--- a/Team Amaan Presents.pptx
+++ b/Team Amaan Presents.pptx
@@ -5,20 +5,24 @@
     <p:sldMasterId id="2147483648" r:id="rId4"/>
   </p:sldMasterIdLst>
   <p:notesMasterIdLst>
-    <p:notesMasterId r:id="rId13"/>
+    <p:notesMasterId r:id="rId17"/>
   </p:notesMasterIdLst>
   <p:handoutMasterIdLst>
-    <p:handoutMasterId r:id="rId14"/>
+    <p:handoutMasterId r:id="rId18"/>
   </p:handoutMasterIdLst>
   <p:sldIdLst>
     <p:sldId id="256" r:id="rId5"/>
     <p:sldId id="278" r:id="rId6"/>
     <p:sldId id="258" r:id="rId7"/>
     <p:sldId id="281" r:id="rId8"/>
-    <p:sldId id="287" r:id="rId9"/>
-    <p:sldId id="289" r:id="rId10"/>
-    <p:sldId id="288" r:id="rId11"/>
-    <p:sldId id="290" r:id="rId12"/>
+    <p:sldId id="291" r:id="rId9"/>
+    <p:sldId id="292" r:id="rId10"/>
+    <p:sldId id="293" r:id="rId11"/>
+    <p:sldId id="294" r:id="rId12"/>
+    <p:sldId id="287" r:id="rId13"/>
+    <p:sldId id="289" r:id="rId14"/>
+    <p:sldId id="288" r:id="rId15"/>
+    <p:sldId id="290" r:id="rId16"/>
   </p:sldIdLst>
   <p:sldSz cx="12192000" cy="6858000"/>
   <p:notesSz cx="6858000" cy="9144000"/>
@@ -222,7 +226,7 @@
           <a:p>
             <a:fld id="{B56F32FC-4BD9-442A-A8C6-51598C909FE3}" type="datetimeFigureOut">
               <a:rPr lang="en-US" smtClean="0"/>
-              <a:t>5/7/2026</a:t>
+              <a:t>5/8/2026</a:t>
             </a:fld>
             <a:endParaRPr lang="en-US" dirty="0"/>
           </a:p>
@@ -399,7 +403,7 @@
           <a:p>
             <a:fld id="{056371FA-A98D-41E8-93F4-09945841298A}" type="datetimeFigureOut">
               <a:rPr lang="en-US" smtClean="0"/>
-              <a:t>5/7/2026</a:t>
+              <a:t>5/8/2026</a:t>
             </a:fld>
             <a:endParaRPr lang="en-US" dirty="0"/>
           </a:p>
@@ -993,6 +997,222 @@
     <p:extLst>
       <p:ext uri="{BB962C8B-B14F-4D97-AF65-F5344CB8AC3E}">
         <p14:creationId xmlns:p14="http://schemas.microsoft.com/office/powerpoint/2010/main" val="1025326889"/>
+      </p:ext>
+    </p:extLst>
+  </p:cSld>
+  <p:clrMapOvr>
+    <a:masterClrMapping/>
+  </p:clrMapOvr>
+</p:notes>
+</file>
+
+<file path=ppt/notesSlides/notesSlide5.xml><?xml version="1.0" encoding="utf-8"?>
+<p:notes xmlns:a="http://schemas.openxmlformats.org/drawingml/2006/main" xmlns:r="http://schemas.openxmlformats.org/officeDocument/2006/relationships" xmlns:p="http://schemas.openxmlformats.org/presentationml/2006/main">
+  <p:cSld>
+    <p:spTree>
+      <p:nvGrpSpPr>
+        <p:cNvPr id="1" name="">
+          <a:extLst>
+            <a:ext uri="{FF2B5EF4-FFF2-40B4-BE49-F238E27FC236}">
+              <a16:creationId xmlns:a16="http://schemas.microsoft.com/office/drawing/2014/main" id="{C6C72625-ED64-EC77-37AD-B097D701F998}"/>
+            </a:ext>
+          </a:extLst>
+        </p:cNvPr>
+        <p:cNvGrpSpPr/>
+        <p:nvPr/>
+      </p:nvGrpSpPr>
+      <p:grpSpPr>
+        <a:xfrm>
+          <a:off x="0" y="0"/>
+          <a:ext cx="0" cy="0"/>
+          <a:chOff x="0" y="0"/>
+          <a:chExt cx="0" cy="0"/>
+        </a:xfrm>
+      </p:grpSpPr>
+      <p:sp>
+        <p:nvSpPr>
+          <p:cNvPr id="2" name="Slide Image Placeholder 1">
+            <a:extLst>
+              <a:ext uri="{FF2B5EF4-FFF2-40B4-BE49-F238E27FC236}">
+                <a16:creationId xmlns:a16="http://schemas.microsoft.com/office/drawing/2014/main" id="{64470149-B2CE-9974-F8CF-FF3E984F35E2}"/>
+              </a:ext>
+            </a:extLst>
+          </p:cNvPr>
+          <p:cNvSpPr>
+            <a:spLocks noGrp="1" noRot="1" noChangeAspect="1"/>
+          </p:cNvSpPr>
+          <p:nvPr>
+            <p:ph type="sldImg"/>
+          </p:nvPr>
+        </p:nvSpPr>
+        <p:spPr/>
+      </p:sp>
+      <p:sp>
+        <p:nvSpPr>
+          <p:cNvPr id="3" name="Notes Placeholder 2">
+            <a:extLst>
+              <a:ext uri="{FF2B5EF4-FFF2-40B4-BE49-F238E27FC236}">
+                <a16:creationId xmlns:a16="http://schemas.microsoft.com/office/drawing/2014/main" id="{D2C0E079-5424-625C-1DB9-CA0AE39067E9}"/>
+              </a:ext>
+            </a:extLst>
+          </p:cNvPr>
+          <p:cNvSpPr>
+            <a:spLocks noGrp="1"/>
+          </p:cNvSpPr>
+          <p:nvPr>
+            <p:ph type="body" idx="1"/>
+          </p:nvPr>
+        </p:nvSpPr>
+        <p:spPr/>
+        <p:txBody>
+          <a:bodyPr/>
+          <a:lstStyle/>
+          <a:p>
+            <a:endParaRPr lang="en-US" dirty="0"/>
+          </a:p>
+        </p:txBody>
+      </p:sp>
+      <p:sp>
+        <p:nvSpPr>
+          <p:cNvPr id="4" name="Slide Number Placeholder 3">
+            <a:extLst>
+              <a:ext uri="{FF2B5EF4-FFF2-40B4-BE49-F238E27FC236}">
+                <a16:creationId xmlns:a16="http://schemas.microsoft.com/office/drawing/2014/main" id="{E0A19E14-7374-787E-739C-571A49624211}"/>
+              </a:ext>
+            </a:extLst>
+          </p:cNvPr>
+          <p:cNvSpPr>
+            <a:spLocks noGrp="1"/>
+          </p:cNvSpPr>
+          <p:nvPr>
+            <p:ph type="sldNum" sz="quarter" idx="5"/>
+          </p:nvPr>
+        </p:nvSpPr>
+        <p:spPr/>
+        <p:txBody>
+          <a:bodyPr/>
+          <a:lstStyle/>
+          <a:p>
+            <a:fld id="{22289C57-55D7-40A4-A101-E74FAC7A092B}" type="slidenum">
+              <a:rPr lang="en-US" smtClean="0"/>
+              <a:t>5</a:t>
+            </a:fld>
+            <a:endParaRPr lang="en-US" dirty="0"/>
+          </a:p>
+        </p:txBody>
+      </p:sp>
+    </p:spTree>
+    <p:extLst>
+      <p:ext uri="{BB962C8B-B14F-4D97-AF65-F5344CB8AC3E}">
+        <p14:creationId xmlns:p14="http://schemas.microsoft.com/office/powerpoint/2010/main" val="1360259815"/>
+      </p:ext>
+    </p:extLst>
+  </p:cSld>
+  <p:clrMapOvr>
+    <a:masterClrMapping/>
+  </p:clrMapOvr>
+</p:notes>
+</file>
+
+<file path=ppt/notesSlides/notesSlide6.xml><?xml version="1.0" encoding="utf-8"?>
+<p:notes xmlns:a="http://schemas.openxmlformats.org/drawingml/2006/main" xmlns:r="http://schemas.openxmlformats.org/officeDocument/2006/relationships" xmlns:p="http://schemas.openxmlformats.org/presentationml/2006/main">
+  <p:cSld>
+    <p:spTree>
+      <p:nvGrpSpPr>
+        <p:cNvPr id="1" name="">
+          <a:extLst>
+            <a:ext uri="{FF2B5EF4-FFF2-40B4-BE49-F238E27FC236}">
+              <a16:creationId xmlns:a16="http://schemas.microsoft.com/office/drawing/2014/main" id="{3E6E8A89-3CE6-64A0-FD98-517FADEE6033}"/>
+            </a:ext>
+          </a:extLst>
+        </p:cNvPr>
+        <p:cNvGrpSpPr/>
+        <p:nvPr/>
+      </p:nvGrpSpPr>
+      <p:grpSpPr>
+        <a:xfrm>
+          <a:off x="0" y="0"/>
+          <a:ext cx="0" cy="0"/>
+          <a:chOff x="0" y="0"/>
+          <a:chExt cx="0" cy="0"/>
+        </a:xfrm>
+      </p:grpSpPr>
+      <p:sp>
+        <p:nvSpPr>
+          <p:cNvPr id="2" name="Slide Image Placeholder 1">
+            <a:extLst>
+              <a:ext uri="{FF2B5EF4-FFF2-40B4-BE49-F238E27FC236}">
+                <a16:creationId xmlns:a16="http://schemas.microsoft.com/office/drawing/2014/main" id="{BD680BB7-299C-F855-E113-8CC67BF28B37}"/>
+              </a:ext>
+            </a:extLst>
+          </p:cNvPr>
+          <p:cNvSpPr>
+            <a:spLocks noGrp="1" noRot="1" noChangeAspect="1"/>
+          </p:cNvSpPr>
+          <p:nvPr>
+            <p:ph type="sldImg"/>
+          </p:nvPr>
+        </p:nvSpPr>
+        <p:spPr/>
+      </p:sp>
+      <p:sp>
+        <p:nvSpPr>
+          <p:cNvPr id="3" name="Notes Placeholder 2">
+            <a:extLst>
+              <a:ext uri="{FF2B5EF4-FFF2-40B4-BE49-F238E27FC236}">
+                <a16:creationId xmlns:a16="http://schemas.microsoft.com/office/drawing/2014/main" id="{D4CBBA0B-5BD4-2C35-2117-9ECFF4517AEF}"/>
+              </a:ext>
+            </a:extLst>
+          </p:cNvPr>
+          <p:cNvSpPr>
+            <a:spLocks noGrp="1"/>
+          </p:cNvSpPr>
+          <p:nvPr>
+            <p:ph type="body" idx="1"/>
+          </p:nvPr>
+        </p:nvSpPr>
+        <p:spPr/>
+        <p:txBody>
+          <a:bodyPr/>
+          <a:lstStyle/>
+          <a:p>
+            <a:endParaRPr lang="en-US" dirty="0"/>
+          </a:p>
+        </p:txBody>
+      </p:sp>
+      <p:sp>
+        <p:nvSpPr>
+          <p:cNvPr id="4" name="Slide Number Placeholder 3">
+            <a:extLst>
+              <a:ext uri="{FF2B5EF4-FFF2-40B4-BE49-F238E27FC236}">
+                <a16:creationId xmlns:a16="http://schemas.microsoft.com/office/drawing/2014/main" id="{F70F46B8-BD4A-A622-FAE0-FB9F4815C9CD}"/>
+              </a:ext>
+            </a:extLst>
+          </p:cNvPr>
+          <p:cNvSpPr>
+            <a:spLocks noGrp="1"/>
+          </p:cNvSpPr>
+          <p:nvPr>
+            <p:ph type="sldNum" sz="quarter" idx="5"/>
+          </p:nvPr>
+        </p:nvSpPr>
+        <p:spPr/>
+        <p:txBody>
+          <a:bodyPr/>
+          <a:lstStyle/>
+          <a:p>
+            <a:fld id="{22289C57-55D7-40A4-A101-E74FAC7A092B}" type="slidenum">
+              <a:rPr lang="en-US" smtClean="0"/>
+              <a:t>6</a:t>
+            </a:fld>
+            <a:endParaRPr lang="en-US" dirty="0"/>
+          </a:p>
+        </p:txBody>
+      </p:sp>
+    </p:spTree>
+    <p:extLst>
+      <p:ext uri="{BB962C8B-B14F-4D97-AF65-F5344CB8AC3E}">
+        <p14:creationId xmlns:p14="http://schemas.microsoft.com/office/powerpoint/2010/main" val="1524708988"/>
       </p:ext>
     </p:extLst>
   </p:cSld>
@@ -6448,6 +6668,325 @@
 </p:sld>
 </file>
 
+<file path=ppt/slides/slide10.xml><?xml version="1.0" encoding="utf-8"?>
+<p:sld xmlns:a="http://schemas.openxmlformats.org/drawingml/2006/main" xmlns:r="http://schemas.openxmlformats.org/officeDocument/2006/relationships" xmlns:p="http://schemas.openxmlformats.org/presentationml/2006/main">
+  <p:cSld>
+    <p:spTree>
+      <p:nvGrpSpPr>
+        <p:cNvPr id="1" name=""/>
+        <p:cNvGrpSpPr/>
+        <p:nvPr/>
+      </p:nvGrpSpPr>
+      <p:grpSpPr>
+        <a:xfrm>
+          <a:off x="0" y="0"/>
+          <a:ext cx="0" cy="0"/>
+          <a:chOff x="0" y="0"/>
+          <a:chExt cx="0" cy="0"/>
+        </a:xfrm>
+      </p:grpSpPr>
+      <p:sp>
+        <p:nvSpPr>
+          <p:cNvPr id="2" name="Title 1">
+            <a:extLst>
+              <a:ext uri="{FF2B5EF4-FFF2-40B4-BE49-F238E27FC236}">
+                <a16:creationId xmlns:a16="http://schemas.microsoft.com/office/drawing/2014/main" id="{74AFBDAA-C8B4-46F5-9884-19C15B728D21}"/>
+              </a:ext>
+            </a:extLst>
+          </p:cNvPr>
+          <p:cNvSpPr>
+            <a:spLocks noGrp="1"/>
+          </p:cNvSpPr>
+          <p:nvPr>
+            <p:ph type="title"/>
+          </p:nvPr>
+        </p:nvSpPr>
+        <p:spPr/>
+        <p:txBody>
+          <a:bodyPr/>
+          <a:lstStyle/>
+          <a:p>
+            <a:r>
+              <a:rPr lang="en-US" dirty="0"/>
+              <a:t>Bugs and Errors so far</a:t>
+            </a:r>
+          </a:p>
+        </p:txBody>
+      </p:sp>
+      <p:sp>
+        <p:nvSpPr>
+          <p:cNvPr id="4" name="Slide Number Placeholder 3">
+            <a:extLst>
+              <a:ext uri="{FF2B5EF4-FFF2-40B4-BE49-F238E27FC236}">
+                <a16:creationId xmlns:a16="http://schemas.microsoft.com/office/drawing/2014/main" id="{8BDEAF9F-362D-32E6-CDB6-58F958F4583E}"/>
+              </a:ext>
+            </a:extLst>
+          </p:cNvPr>
+          <p:cNvSpPr>
+            <a:spLocks noGrp="1"/>
+          </p:cNvSpPr>
+          <p:nvPr>
+            <p:ph type="sldNum" sz="quarter" idx="12"/>
+          </p:nvPr>
+        </p:nvSpPr>
+        <p:spPr/>
+        <p:txBody>
+          <a:bodyPr/>
+          <a:lstStyle/>
+          <a:p>
+            <a:fld id="{A49DFD55-3C28-40EF-9E31-A92D2E4017FF}" type="slidenum">
+              <a:rPr lang="en-US" smtClean="0"/>
+              <a:pPr/>
+              <a:t>10</a:t>
+            </a:fld>
+            <a:endParaRPr lang="en-US" dirty="0"/>
+          </a:p>
+        </p:txBody>
+      </p:sp>
+    </p:spTree>
+    <p:extLst>
+      <p:ext uri="{BB962C8B-B14F-4D97-AF65-F5344CB8AC3E}">
+        <p14:creationId xmlns:p14="http://schemas.microsoft.com/office/powerpoint/2010/main" val="2777342368"/>
+      </p:ext>
+    </p:extLst>
+  </p:cSld>
+  <p:clrMapOvr>
+    <a:masterClrMapping/>
+  </p:clrMapOvr>
+</p:sld>
+</file>
+
+<file path=ppt/slides/slide11.xml><?xml version="1.0" encoding="utf-8"?>
+<p:sld xmlns:a="http://schemas.openxmlformats.org/drawingml/2006/main" xmlns:r="http://schemas.openxmlformats.org/officeDocument/2006/relationships" xmlns:p="http://schemas.openxmlformats.org/presentationml/2006/main">
+  <p:cSld>
+    <p:spTree>
+      <p:nvGrpSpPr>
+        <p:cNvPr id="1" name=""/>
+        <p:cNvGrpSpPr/>
+        <p:nvPr/>
+      </p:nvGrpSpPr>
+      <p:grpSpPr>
+        <a:xfrm>
+          <a:off x="0" y="0"/>
+          <a:ext cx="0" cy="0"/>
+          <a:chOff x="0" y="0"/>
+          <a:chExt cx="0" cy="0"/>
+        </a:xfrm>
+      </p:grpSpPr>
+      <p:sp>
+        <p:nvSpPr>
+          <p:cNvPr id="2" name="Title 1">
+            <a:extLst>
+              <a:ext uri="{FF2B5EF4-FFF2-40B4-BE49-F238E27FC236}">
+                <a16:creationId xmlns:a16="http://schemas.microsoft.com/office/drawing/2014/main" id="{1CE9C4CE-EEB4-4BA7-C219-8F490EFFC3FD}"/>
+              </a:ext>
+            </a:extLst>
+          </p:cNvPr>
+          <p:cNvSpPr>
+            <a:spLocks noGrp="1"/>
+          </p:cNvSpPr>
+          <p:nvPr>
+            <p:ph type="ctrTitle"/>
+          </p:nvPr>
+        </p:nvSpPr>
+        <p:spPr/>
+        <p:txBody>
+          <a:bodyPr/>
+          <a:lstStyle/>
+          <a:p>
+            <a:r>
+              <a:rPr lang="en-US" dirty="0"/>
+              <a:t>Demo Time</a:t>
+            </a:r>
+          </a:p>
+        </p:txBody>
+      </p:sp>
+    </p:spTree>
+    <p:extLst>
+      <p:ext uri="{BB962C8B-B14F-4D97-AF65-F5344CB8AC3E}">
+        <p14:creationId xmlns:p14="http://schemas.microsoft.com/office/powerpoint/2010/main" val="2513671328"/>
+      </p:ext>
+    </p:extLst>
+  </p:cSld>
+  <p:clrMapOvr>
+    <a:masterClrMapping/>
+  </p:clrMapOvr>
+</p:sld>
+</file>
+
+<file path=ppt/slides/slide12.xml><?xml version="1.0" encoding="utf-8"?>
+<p:sld xmlns:a="http://schemas.openxmlformats.org/drawingml/2006/main" xmlns:r="http://schemas.openxmlformats.org/officeDocument/2006/relationships" xmlns:p="http://schemas.openxmlformats.org/presentationml/2006/main">
+  <p:cSld>
+    <p:spTree>
+      <p:nvGrpSpPr>
+        <p:cNvPr id="1" name=""/>
+        <p:cNvGrpSpPr/>
+        <p:nvPr/>
+      </p:nvGrpSpPr>
+      <p:grpSpPr>
+        <a:xfrm>
+          <a:off x="0" y="0"/>
+          <a:ext cx="0" cy="0"/>
+          <a:chOff x="0" y="0"/>
+          <a:chExt cx="0" cy="0"/>
+        </a:xfrm>
+      </p:grpSpPr>
+      <p:sp>
+        <p:nvSpPr>
+          <p:cNvPr id="2" name="Title 1">
+            <a:extLst>
+              <a:ext uri="{FF2B5EF4-FFF2-40B4-BE49-F238E27FC236}">
+                <a16:creationId xmlns:a16="http://schemas.microsoft.com/office/drawing/2014/main" id="{F7412623-7646-70A5-1983-06EA443E1CA9}"/>
+              </a:ext>
+            </a:extLst>
+          </p:cNvPr>
+          <p:cNvSpPr>
+            <a:spLocks noGrp="1"/>
+          </p:cNvSpPr>
+          <p:nvPr>
+            <p:ph type="title"/>
+          </p:nvPr>
+        </p:nvSpPr>
+        <p:spPr/>
+        <p:txBody>
+          <a:bodyPr/>
+          <a:lstStyle/>
+          <a:p>
+            <a:r>
+              <a:rPr lang="en-US" dirty="0"/>
+              <a:t>Summary</a:t>
+            </a:r>
+          </a:p>
+        </p:txBody>
+      </p:sp>
+      <p:sp>
+        <p:nvSpPr>
+          <p:cNvPr id="6" name="Text Placeholder 5">
+            <a:extLst>
+              <a:ext uri="{FF2B5EF4-FFF2-40B4-BE49-F238E27FC236}">
+                <a16:creationId xmlns:a16="http://schemas.microsoft.com/office/drawing/2014/main" id="{C61CA0EF-192C-A468-9A6D-58F30EA65412}"/>
+              </a:ext>
+            </a:extLst>
+          </p:cNvPr>
+          <p:cNvSpPr>
+            <a:spLocks noGrp="1"/>
+          </p:cNvSpPr>
+          <p:nvPr>
+            <p:ph type="body" idx="1"/>
+          </p:nvPr>
+        </p:nvSpPr>
+        <p:spPr/>
+        <p:txBody>
+          <a:bodyPr/>
+          <a:lstStyle/>
+          <a:p>
+            <a:endParaRPr lang="en-US"/>
+          </a:p>
+        </p:txBody>
+      </p:sp>
+      <p:sp>
+        <p:nvSpPr>
+          <p:cNvPr id="7" name="Content Placeholder 6">
+            <a:extLst>
+              <a:ext uri="{FF2B5EF4-FFF2-40B4-BE49-F238E27FC236}">
+                <a16:creationId xmlns:a16="http://schemas.microsoft.com/office/drawing/2014/main" id="{AA6EA2AD-4304-C831-16D1-C48E08A1B23C}"/>
+              </a:ext>
+            </a:extLst>
+          </p:cNvPr>
+          <p:cNvSpPr>
+            <a:spLocks noGrp="1"/>
+          </p:cNvSpPr>
+          <p:nvPr>
+            <p:ph sz="half" idx="2"/>
+          </p:nvPr>
+        </p:nvSpPr>
+        <p:spPr/>
+        <p:txBody>
+          <a:bodyPr/>
+          <a:lstStyle/>
+          <a:p>
+            <a:endParaRPr lang="en-US"/>
+          </a:p>
+        </p:txBody>
+      </p:sp>
+      <p:sp>
+        <p:nvSpPr>
+          <p:cNvPr id="9" name="Content Placeholder 8">
+            <a:extLst>
+              <a:ext uri="{FF2B5EF4-FFF2-40B4-BE49-F238E27FC236}">
+                <a16:creationId xmlns:a16="http://schemas.microsoft.com/office/drawing/2014/main" id="{38E0DC34-9DFC-2F04-205B-8217310DD7D9}"/>
+              </a:ext>
+            </a:extLst>
+          </p:cNvPr>
+          <p:cNvSpPr>
+            <a:spLocks noGrp="1"/>
+          </p:cNvSpPr>
+          <p:nvPr>
+            <p:ph sz="half" idx="14"/>
+          </p:nvPr>
+        </p:nvSpPr>
+        <p:spPr/>
+        <p:txBody>
+          <a:bodyPr/>
+          <a:lstStyle/>
+          <a:p>
+            <a:r>
+              <a:rPr lang="en-US" dirty="0"/>
+              <a:t>For Future improvements we have such features in mind:</a:t>
+            </a:r>
+          </a:p>
+          <a:p>
+            <a:pPr marL="285750" indent="-285750">
+              <a:buFont typeface="Arial" panose="020B0604020202020204" pitchFamily="34" charset="0"/>
+              <a:buChar char="•"/>
+            </a:pPr>
+            <a:endParaRPr lang="en-US" dirty="0"/>
+          </a:p>
+        </p:txBody>
+      </p:sp>
+      <p:sp>
+        <p:nvSpPr>
+          <p:cNvPr id="4" name="Slide Number Placeholder 3">
+            <a:extLst>
+              <a:ext uri="{FF2B5EF4-FFF2-40B4-BE49-F238E27FC236}">
+                <a16:creationId xmlns:a16="http://schemas.microsoft.com/office/drawing/2014/main" id="{B80C01E3-CE51-B37E-504A-7D98F3620525}"/>
+              </a:ext>
+            </a:extLst>
+          </p:cNvPr>
+          <p:cNvSpPr>
+            <a:spLocks noGrp="1"/>
+          </p:cNvSpPr>
+          <p:nvPr>
+            <p:ph type="sldNum" sz="quarter" idx="12"/>
+          </p:nvPr>
+        </p:nvSpPr>
+        <p:spPr/>
+        <p:txBody>
+          <a:bodyPr/>
+          <a:lstStyle/>
+          <a:p>
+            <a:fld id="{A49DFD55-3C28-40EF-9E31-A92D2E4017FF}" type="slidenum">
+              <a:rPr lang="en-US" smtClean="0"/>
+              <a:pPr/>
+              <a:t>12</a:t>
+            </a:fld>
+            <a:endParaRPr lang="en-US" dirty="0"/>
+          </a:p>
+        </p:txBody>
+      </p:sp>
+    </p:spTree>
+    <p:extLst>
+      <p:ext uri="{BB962C8B-B14F-4D97-AF65-F5344CB8AC3E}">
+        <p14:creationId xmlns:p14="http://schemas.microsoft.com/office/powerpoint/2010/main" val="918505780"/>
+      </p:ext>
+    </p:extLst>
+  </p:cSld>
+  <p:clrMapOvr>
+    <a:masterClrMapping/>
+  </p:clrMapOvr>
+</p:sld>
+</file>
+
 <file path=ppt/slides/slide2.xml><?xml version="1.0" encoding="utf-8"?>
 <p:sld xmlns:a="http://schemas.openxmlformats.org/drawingml/2006/main" xmlns:r="http://schemas.openxmlformats.org/officeDocument/2006/relationships" xmlns:p="http://schemas.openxmlformats.org/presentationml/2006/main">
   <p:cSld>
@@ -6569,13 +7108,13 @@
             <a:spLocks noGrp="1"/>
           </p:cNvSpPr>
           <p:nvPr>
-            <p:ph idx="1"/>
+            <p:ph sz="half" idx="16"/>
           </p:nvPr>
         </p:nvSpPr>
         <p:spPr/>
         <p:txBody>
           <a:bodyPr>
-            <a:normAutofit/>
+            <a:normAutofit lnSpcReduction="10000"/>
           </a:bodyPr>
           <a:lstStyle/>
           <a:p>
@@ -6591,7 +7130,7 @@
             </a:pPr>
             <a:r>
               <a:rPr lang="en-US" dirty="0"/>
-              <a:t>User gives Input</a:t>
+              <a:t>User gives Input EMF Input</a:t>
             </a:r>
           </a:p>
           <a:p>
@@ -6601,7 +7140,7 @@
             </a:pPr>
             <a:r>
               <a:rPr lang="en-US" dirty="0"/>
-              <a:t>Processed into tokens</a:t>
+              <a:t>Process tokens for generator</a:t>
             </a:r>
           </a:p>
           <a:p>
@@ -6611,7 +7150,7 @@
             </a:pPr>
             <a:r>
               <a:rPr lang="en-US" dirty="0"/>
-              <a:t>Tokens are processed into actions</a:t>
+              <a:t>Create converted MF table</a:t>
             </a:r>
           </a:p>
           <a:p>
@@ -6621,7 +7160,7 @@
             </a:pPr>
             <a:r>
               <a:rPr lang="en-US" dirty="0"/>
-              <a:t>User gets Action</a:t>
+              <a:t>Assess Aggregates and conditionals</a:t>
             </a:r>
           </a:p>
           <a:p>
@@ -6629,7 +7168,10 @@
               <a:buFont typeface="Arial" panose="020B0604020202020204" pitchFamily="34" charset="0"/>
               <a:buChar char="•"/>
             </a:pPr>
-            <a:endParaRPr lang="en-US" dirty="0"/>
+            <a:r>
+              <a:rPr lang="en-US" dirty="0"/>
+              <a:t>Create table after execution of table</a:t>
+            </a:r>
           </a:p>
         </p:txBody>
       </p:sp>
@@ -6688,6 +7230,9 @@
             <a:avLst/>
           </a:prstGeom>
           <a:ln>
+            <a:solidFill>
+              <a:schemeClr val="tx1"/>
+            </a:solidFill>
             <a:tailEnd type="triangle"/>
           </a:ln>
         </p:spPr>
@@ -6726,6 +7271,9 @@
           <a:prstGeom prst="ellipse">
             <a:avLst/>
           </a:prstGeom>
+          <a:solidFill>
+            <a:schemeClr val="bg1"/>
+          </a:solidFill>
         </p:spPr>
         <p:style>
           <a:lnRef idx="2">
@@ -6748,16 +7296,23 @@
           <a:lstStyle/>
           <a:p>
             <a:pPr algn="ctr"/>
-            <a:endParaRPr lang="en-US"/>
-          </a:p>
-        </p:txBody>
-      </p:sp>
-      <p:sp>
-        <p:nvSpPr>
-          <p:cNvPr id="9" name="Oval 8">
-            <a:extLst>
-              <a:ext uri="{FF2B5EF4-FFF2-40B4-BE49-F238E27FC236}">
-                <a16:creationId xmlns:a16="http://schemas.microsoft.com/office/drawing/2014/main" id="{035D30A6-1648-59E3-1BDB-CC1FBFE887CA}"/>
+            <a:r>
+              <a:rPr lang="en-US" dirty="0">
+                <a:solidFill>
+                  <a:schemeClr val="tx1"/>
+                </a:solidFill>
+              </a:rPr>
+              <a:t>Parser</a:t>
+            </a:r>
+          </a:p>
+        </p:txBody>
+      </p:sp>
+      <p:sp>
+        <p:nvSpPr>
+          <p:cNvPr id="10" name="Oval 9">
+            <a:extLst>
+              <a:ext uri="{FF2B5EF4-FFF2-40B4-BE49-F238E27FC236}">
+                <a16:creationId xmlns:a16="http://schemas.microsoft.com/office/drawing/2014/main" id="{1128D1FA-4A2D-DDCC-279F-E57DCF0C654C}"/>
               </a:ext>
             </a:extLst>
           </p:cNvPr>
@@ -6766,12 +7321,15 @@
         </p:nvSpPr>
         <p:spPr>
           <a:xfrm>
-            <a:off x="7394400" y="2346006"/>
-            <a:ext cx="1519200" cy="1491591"/>
+            <a:off x="8802612" y="2900607"/>
+            <a:ext cx="1690776" cy="1630379"/>
           </a:xfrm>
           <a:prstGeom prst="ellipse">
             <a:avLst/>
           </a:prstGeom>
+          <a:solidFill>
+            <a:schemeClr val="bg1"/>
+          </a:solidFill>
         </p:spPr>
         <p:style>
           <a:lnRef idx="2">
@@ -6794,16 +7352,23 @@
           <a:lstStyle/>
           <a:p>
             <a:pPr algn="ctr"/>
-            <a:endParaRPr lang="en-US"/>
-          </a:p>
-        </p:txBody>
-      </p:sp>
-      <p:sp>
-        <p:nvSpPr>
-          <p:cNvPr id="10" name="Oval 9">
-            <a:extLst>
-              <a:ext uri="{FF2B5EF4-FFF2-40B4-BE49-F238E27FC236}">
-                <a16:creationId xmlns:a16="http://schemas.microsoft.com/office/drawing/2014/main" id="{1128D1FA-4A2D-DDCC-279F-E57DCF0C654C}"/>
+            <a:r>
+              <a:rPr lang="en-US" dirty="0">
+                <a:solidFill>
+                  <a:schemeClr val="tx1"/>
+                </a:solidFill>
+              </a:rPr>
+              <a:t>Generator</a:t>
+            </a:r>
+          </a:p>
+        </p:txBody>
+      </p:sp>
+      <p:sp>
+        <p:nvSpPr>
+          <p:cNvPr id="11" name="Rectangle 10">
+            <a:extLst>
+              <a:ext uri="{FF2B5EF4-FFF2-40B4-BE49-F238E27FC236}">
+                <a16:creationId xmlns:a16="http://schemas.microsoft.com/office/drawing/2014/main" id="{FAFA0AC4-2CDD-A966-264F-D43463F62545}"/>
               </a:ext>
             </a:extLst>
           </p:cNvPr>
@@ -6812,12 +7377,15 @@
         </p:nvSpPr>
         <p:spPr>
           <a:xfrm>
-            <a:off x="9841702" y="2346007"/>
-            <a:ext cx="1519200" cy="1491591"/>
-          </a:xfrm>
-          <a:prstGeom prst="ellipse">
+            <a:off x="5008800" y="4701605"/>
+            <a:ext cx="2174400" cy="1241997"/>
+          </a:xfrm>
+          <a:prstGeom prst="rect">
             <a:avLst/>
           </a:prstGeom>
+          <a:solidFill>
+            <a:schemeClr val="bg1"/>
+          </a:solidFill>
         </p:spPr>
         <p:style>
           <a:lnRef idx="2">
@@ -6840,166 +7408,45 @@
           <a:lstStyle/>
           <a:p>
             <a:pPr algn="ctr"/>
-            <a:endParaRPr lang="en-US"/>
-          </a:p>
-        </p:txBody>
-      </p:sp>
-      <p:sp>
-        <p:nvSpPr>
-          <p:cNvPr id="11" name="Rectangle 10">
-            <a:extLst>
-              <a:ext uri="{FF2B5EF4-FFF2-40B4-BE49-F238E27FC236}">
-                <a16:creationId xmlns:a16="http://schemas.microsoft.com/office/drawing/2014/main" id="{FAFA0AC4-2CDD-A966-264F-D43463F62545}"/>
-              </a:ext>
-            </a:extLst>
-          </p:cNvPr>
-          <p:cNvSpPr/>
-          <p:nvPr/>
-        </p:nvSpPr>
-        <p:spPr>
-          <a:xfrm>
-            <a:off x="5008800" y="4701605"/>
-            <a:ext cx="2174400" cy="1241997"/>
-          </a:xfrm>
-          <a:prstGeom prst="rect">
-            <a:avLst/>
-          </a:prstGeom>
-        </p:spPr>
-        <p:style>
-          <a:lnRef idx="2">
-            <a:schemeClr val="accent1">
-              <a:shade val="15000"/>
-            </a:schemeClr>
-          </a:lnRef>
-          <a:fillRef idx="1">
-            <a:schemeClr val="accent1"/>
-          </a:fillRef>
-          <a:effectRef idx="0">
-            <a:schemeClr val="accent1"/>
-          </a:effectRef>
-          <a:fontRef idx="minor">
-            <a:schemeClr val="lt1"/>
-          </a:fontRef>
-        </p:style>
-        <p:txBody>
-          <a:bodyPr rtlCol="0" anchor="ctr"/>
-          <a:lstStyle/>
-          <a:p>
-            <a:pPr algn="ctr"/>
-            <a:endParaRPr lang="en-US"/>
+            <a:r>
+              <a:rPr lang="en-US" dirty="0">
+                <a:solidFill>
+                  <a:schemeClr val="tx1"/>
+                </a:solidFill>
+              </a:rPr>
+              <a:t>Table Output</a:t>
+            </a:r>
           </a:p>
         </p:txBody>
       </p:sp>
       <p:cxnSp>
         <p:nvCxnSpPr>
-          <p:cNvPr id="13" name="Straight Arrow Connector 12">
-            <a:extLst>
-              <a:ext uri="{FF2B5EF4-FFF2-40B4-BE49-F238E27FC236}">
-                <a16:creationId xmlns:a16="http://schemas.microsoft.com/office/drawing/2014/main" id="{B89D7E9A-90A7-3C13-20AA-FB837764E79C}"/>
+          <p:cNvPr id="16" name="Straight Arrow Connector 15">
+            <a:extLst>
+              <a:ext uri="{FF2B5EF4-FFF2-40B4-BE49-F238E27FC236}">
+                <a16:creationId xmlns:a16="http://schemas.microsoft.com/office/drawing/2014/main" id="{62FC361A-0420-5B0A-46FA-3FE1B535C0C6}"/>
               </a:ext>
             </a:extLst>
           </p:cNvPr>
           <p:cNvCxnSpPr>
             <a:cxnSpLocks/>
-            <a:stCxn id="7" idx="3"/>
-            <a:endCxn id="9" idx="0"/>
+            <a:stCxn id="7" idx="4"/>
+            <a:endCxn id="10" idx="0"/>
           </p:cNvCxnSpPr>
           <p:nvPr/>
         </p:nvCxnSpPr>
         <p:spPr>
-          <a:xfrm flipH="1">
-            <a:off x="8154000" y="1613412"/>
-            <a:ext cx="842330" cy="732594"/>
+          <a:xfrm>
+            <a:off x="9648000" y="1861200"/>
+            <a:ext cx="0" cy="1039407"/>
           </a:xfrm>
           <a:prstGeom prst="straightConnector1">
             <a:avLst/>
           </a:prstGeom>
           <a:ln>
-            <a:tailEnd type="triangle"/>
-          </a:ln>
-        </p:spPr>
-        <p:style>
-          <a:lnRef idx="1">
-            <a:schemeClr val="accent1"/>
-          </a:lnRef>
-          <a:fillRef idx="0">
-            <a:schemeClr val="accent1"/>
-          </a:fillRef>
-          <a:effectRef idx="0">
-            <a:schemeClr val="accent1"/>
-          </a:effectRef>
-          <a:fontRef idx="minor">
-            <a:schemeClr val="tx1"/>
-          </a:fontRef>
-        </p:style>
-      </p:cxnSp>
-      <p:cxnSp>
-        <p:nvCxnSpPr>
-          <p:cNvPr id="16" name="Straight Arrow Connector 15">
-            <a:extLst>
-              <a:ext uri="{FF2B5EF4-FFF2-40B4-BE49-F238E27FC236}">
-                <a16:creationId xmlns:a16="http://schemas.microsoft.com/office/drawing/2014/main" id="{62FC361A-0420-5B0A-46FA-3FE1B535C0C6}"/>
-              </a:ext>
-            </a:extLst>
-          </p:cNvPr>
-          <p:cNvCxnSpPr>
-            <a:cxnSpLocks/>
-            <a:stCxn id="7" idx="5"/>
-            <a:endCxn id="10" idx="0"/>
-          </p:cNvCxnSpPr>
-          <p:nvPr/>
-        </p:nvCxnSpPr>
-        <p:spPr>
-          <a:xfrm>
-            <a:off x="10299670" y="1613412"/>
-            <a:ext cx="301632" cy="732595"/>
-          </a:xfrm>
-          <a:prstGeom prst="straightConnector1">
-            <a:avLst/>
-          </a:prstGeom>
-          <a:ln>
-            <a:tailEnd type="triangle"/>
-          </a:ln>
-        </p:spPr>
-        <p:style>
-          <a:lnRef idx="1">
-            <a:schemeClr val="accent1"/>
-          </a:lnRef>
-          <a:fillRef idx="0">
-            <a:schemeClr val="accent1"/>
-          </a:fillRef>
-          <a:effectRef idx="0">
-            <a:schemeClr val="accent1"/>
-          </a:effectRef>
-          <a:fontRef idx="minor">
-            <a:schemeClr val="tx1"/>
-          </a:fontRef>
-        </p:style>
-      </p:cxnSp>
-      <p:cxnSp>
-        <p:nvCxnSpPr>
-          <p:cNvPr id="22" name="Connector: Elbow 21">
-            <a:extLst>
-              <a:ext uri="{FF2B5EF4-FFF2-40B4-BE49-F238E27FC236}">
-                <a16:creationId xmlns:a16="http://schemas.microsoft.com/office/drawing/2014/main" id="{044B0D2C-0F0D-6498-E22C-E0B9F17C34DE}"/>
-              </a:ext>
-            </a:extLst>
-          </p:cNvPr>
-          <p:cNvCxnSpPr>
-            <a:stCxn id="9" idx="4"/>
-            <a:endCxn id="11" idx="3"/>
-          </p:cNvCxnSpPr>
-          <p:nvPr/>
-        </p:nvCxnSpPr>
-        <p:spPr>
-          <a:xfrm rot="5400000">
-            <a:off x="6926097" y="4094700"/>
-            <a:ext cx="1485007" cy="970800"/>
-          </a:xfrm>
-          <a:prstGeom prst="bentConnector2">
-            <a:avLst/>
-          </a:prstGeom>
-          <a:ln>
+            <a:solidFill>
+              <a:schemeClr val="tx1"/>
+            </a:solidFill>
             <a:tailEnd type="triangle"/>
           </a:ln>
         </p:spPr>
@@ -7036,13 +7483,16 @@
         </p:nvCxnSpPr>
         <p:spPr>
           <a:xfrm rot="5400000">
-            <a:off x="8149748" y="2871050"/>
-            <a:ext cx="1485006" cy="3418102"/>
+            <a:off x="8019791" y="3694395"/>
+            <a:ext cx="791618" cy="2464800"/>
           </a:xfrm>
           <a:prstGeom prst="bentConnector2">
             <a:avLst/>
           </a:prstGeom>
           <a:ln>
+            <a:solidFill>
+              <a:schemeClr val="tx1"/>
+            </a:solidFill>
             <a:tailEnd type="triangle"/>
           </a:ln>
         </p:spPr>
@@ -7081,6 +7531,9 @@
           <a:prstGeom prst="rect">
             <a:avLst/>
           </a:prstGeom>
+          <a:solidFill>
+            <a:schemeClr val="bg1"/>
+          </a:solidFill>
         </p:spPr>
         <p:style>
           <a:lnRef idx="2">
@@ -7103,7 +7556,14 @@
           <a:lstStyle/>
           <a:p>
             <a:pPr algn="ctr"/>
-            <a:endParaRPr lang="en-US" dirty="0"/>
+            <a:r>
+              <a:rPr lang="en-US" dirty="0">
+                <a:solidFill>
+                  <a:schemeClr val="tx1"/>
+                </a:solidFill>
+              </a:rPr>
+              <a:t>User Input</a:t>
+            </a:r>
           </a:p>
         </p:txBody>
       </p:sp>
@@ -7305,7 +7765,13 @@
   <p:cSld>
     <p:spTree>
       <p:nvGrpSpPr>
-        <p:cNvPr id="1" name=""/>
+        <p:cNvPr id="1" name="">
+          <a:extLst>
+            <a:ext uri="{FF2B5EF4-FFF2-40B4-BE49-F238E27FC236}">
+              <a16:creationId xmlns:a16="http://schemas.microsoft.com/office/drawing/2014/main" id="{A4077EFB-2C1E-362D-1372-8A27D680C86E}"/>
+            </a:ext>
+          </a:extLst>
+        </p:cNvPr>
         <p:cNvGrpSpPr/>
         <p:nvPr/>
       </p:nvGrpSpPr>
@@ -7319,10 +7785,10 @@
       </p:grpSpPr>
       <p:sp>
         <p:nvSpPr>
-          <p:cNvPr id="5" name="Title 4">
-            <a:extLst>
-              <a:ext uri="{FF2B5EF4-FFF2-40B4-BE49-F238E27FC236}">
-                <a16:creationId xmlns:a16="http://schemas.microsoft.com/office/drawing/2014/main" id="{1BBBFCE1-CF2C-D025-61FF-603A99A64B63}"/>
+          <p:cNvPr id="2" name="Title 1">
+            <a:extLst>
+              <a:ext uri="{FF2B5EF4-FFF2-40B4-BE49-F238E27FC236}">
+                <a16:creationId xmlns:a16="http://schemas.microsoft.com/office/drawing/2014/main" id="{B75B4609-EE3E-F075-D29F-07F8FBB5F13F}"/>
               </a:ext>
             </a:extLst>
           </p:cNvPr>
@@ -7333,42 +7799,29 @@
             <p:ph type="title"/>
           </p:nvPr>
         </p:nvSpPr>
-        <p:spPr/>
+        <p:spPr>
+          <a:xfrm>
+            <a:off x="2933700" y="372140"/>
+            <a:ext cx="8420100" cy="1231373"/>
+          </a:xfrm>
+        </p:spPr>
         <p:txBody>
           <a:bodyPr/>
           <a:lstStyle/>
           <a:p>
             <a:r>
               <a:rPr lang="en-US" dirty="0"/>
-              <a:t>Tech Stack</a:t>
-            </a:r>
-          </a:p>
-        </p:txBody>
-      </p:sp>
-      <p:sp>
-        <p:nvSpPr>
-          <p:cNvPr id="6" name="Picture Placeholder 5">
-            <a:extLst>
-              <a:ext uri="{FF2B5EF4-FFF2-40B4-BE49-F238E27FC236}">
-                <a16:creationId xmlns:a16="http://schemas.microsoft.com/office/drawing/2014/main" id="{C50CAE42-9734-8964-8A40-34797844D033}"/>
-              </a:ext>
-            </a:extLst>
-          </p:cNvPr>
-          <p:cNvSpPr>
-            <a:spLocks noGrp="1"/>
-          </p:cNvSpPr>
-          <p:nvPr>
-            <p:ph type="pic" sz="quarter" idx="13"/>
-          </p:nvPr>
-        </p:nvSpPr>
-        <p:spPr/>
-      </p:sp>
-      <p:sp>
-        <p:nvSpPr>
-          <p:cNvPr id="4" name="Slide Number Placeholder 3">
-            <a:extLst>
-              <a:ext uri="{FF2B5EF4-FFF2-40B4-BE49-F238E27FC236}">
-                <a16:creationId xmlns:a16="http://schemas.microsoft.com/office/drawing/2014/main" id="{97C2AED4-F61D-7674-0A42-124FAECEFCAA}"/>
+              <a:t>Parser Conversion</a:t>
+            </a:r>
+          </a:p>
+        </p:txBody>
+      </p:sp>
+      <p:sp>
+        <p:nvSpPr>
+          <p:cNvPr id="8" name="Slide Number Placeholder 7">
+            <a:extLst>
+              <a:ext uri="{FF2B5EF4-FFF2-40B4-BE49-F238E27FC236}">
+                <a16:creationId xmlns:a16="http://schemas.microsoft.com/office/drawing/2014/main" id="{10BA88A8-C398-3BE2-ABBA-B9E12D6E50EB}"/>
               </a:ext>
             </a:extLst>
           </p:cNvPr>
@@ -7379,7 +7832,12 @@
             <p:ph type="sldNum" sz="quarter" idx="12"/>
           </p:nvPr>
         </p:nvSpPr>
-        <p:spPr/>
+        <p:spPr>
+          <a:xfrm>
+            <a:off x="10373350" y="6356349"/>
+            <a:ext cx="987552" cy="365125"/>
+          </a:xfrm>
+        </p:spPr>
         <p:txBody>
           <a:bodyPr/>
           <a:lstStyle/>
@@ -7395,10 +7853,10 @@
       </p:sp>
       <p:sp>
         <p:nvSpPr>
-          <p:cNvPr id="7" name="Content Placeholder 6">
-            <a:extLst>
-              <a:ext uri="{FF2B5EF4-FFF2-40B4-BE49-F238E27FC236}">
-                <a16:creationId xmlns:a16="http://schemas.microsoft.com/office/drawing/2014/main" id="{D8789ECB-A140-2302-E85D-9BE9AA6A268D}"/>
+          <p:cNvPr id="35" name="Content Placeholder 34">
+            <a:extLst>
+              <a:ext uri="{FF2B5EF4-FFF2-40B4-BE49-F238E27FC236}">
+                <a16:creationId xmlns:a16="http://schemas.microsoft.com/office/drawing/2014/main" id="{E138ACA3-319C-14F8-68D6-E6C5673FF627}"/>
               </a:ext>
             </a:extLst>
           </p:cNvPr>
@@ -7406,37 +7864,494 @@
             <a:spLocks noGrp="1"/>
           </p:cNvSpPr>
           <p:nvPr>
-            <p:ph sz="half" idx="14"/>
+            <p:ph sz="half" idx="13"/>
           </p:nvPr>
         </p:nvSpPr>
-        <p:spPr/>
+        <p:spPr>
+          <a:xfrm>
+            <a:off x="2933700" y="2349821"/>
+            <a:ext cx="4368248" cy="4136039"/>
+          </a:xfrm>
+        </p:spPr>
         <p:txBody>
           <a:bodyPr>
-            <a:normAutofit lnSpcReduction="10000"/>
+            <a:normAutofit fontScale="62500" lnSpcReduction="20000"/>
           </a:bodyPr>
           <a:lstStyle/>
           <a:p>
             <a:r>
               <a:rPr lang="en-US" dirty="0"/>
-              <a:t>Python: Used to implement the query-processing parser, syntax validation pipeline, helper utilities, and SQL normalization logic. Python was chosen due to its lightweight syntax and strong support for structured string processing.</a:t>
-            </a:r>
-          </a:p>
-          <a:p>
+              <a:t> SELECT ATTRIBUTE(S):</a:t>
+            </a:r>
+          </a:p>
+          <a:p>
+            <a:r>
+              <a:rPr lang="en-US" dirty="0"/>
+              <a:t>    </a:t>
+            </a:r>
             <a:r>
               <a:rPr lang="en-US" dirty="0" err="1"/>
-              <a:t>Dataclasses</a:t>
-            </a:r>
-            <a:r>
-              <a:rPr lang="en-US" dirty="0"/>
-              <a:t> Library: Used to model aggregate tokens through structured objects containing grouping variables, aggregation functions, attributes, and normalized SQL representations.</a:t>
-            </a:r>
+              <a:t>cust</a:t>
+            </a:r>
+            <a:r>
+              <a:rPr lang="en-US" dirty="0"/>
+              <a:t>, 1_avg_price, 2_sum_quant, 3_min_quant</a:t>
+            </a:r>
+          </a:p>
+          <a:p>
+            <a:r>
+              <a:rPr lang="en-US" dirty="0"/>
+              <a:t>    NUMBER OF GROUPING VARIABLES(n):</a:t>
+            </a:r>
+          </a:p>
+          <a:p>
+            <a:r>
+              <a:rPr lang="en-US" dirty="0"/>
+              <a:t>    3</a:t>
+            </a:r>
+          </a:p>
+          <a:p>
+            <a:r>
+              <a:rPr lang="en-US" dirty="0"/>
+              <a:t>    GROUPING ATTRIBUTES(V):</a:t>
+            </a:r>
+          </a:p>
+          <a:p>
+            <a:r>
+              <a:rPr lang="en-US" dirty="0"/>
+              <a:t>    </a:t>
+            </a:r>
+            <a:r>
+              <a:rPr lang="en-US" dirty="0" err="1"/>
+              <a:t>cust</a:t>
+            </a:r>
+            <a:endParaRPr lang="en-US" dirty="0"/>
+          </a:p>
+          <a:p>
+            <a:r>
+              <a:rPr lang="en-US" dirty="0"/>
+              <a:t>    F-VECT([F]):</a:t>
+            </a:r>
+          </a:p>
+          <a:p>
+            <a:r>
+              <a:rPr lang="en-US" dirty="0"/>
+              <a:t>    1_avg_price, 2_sum_quant, 3_min_quant</a:t>
+            </a:r>
+          </a:p>
+          <a:p>
+            <a:r>
+              <a:rPr lang="en-US" dirty="0"/>
+              <a:t>    SELECT CONDITION-VECT([</a:t>
+            </a:r>
+            <a:r>
+              <a:rPr lang="el-GR" dirty="0"/>
+              <a:t>σ]):</a:t>
+            </a:r>
+          </a:p>
+          <a:p>
+            <a:r>
+              <a:rPr lang="el-GR" dirty="0"/>
+              <a:t>    1.</a:t>
+            </a:r>
+            <a:r>
+              <a:rPr lang="en-US" dirty="0"/>
+              <a:t>state='CA' and  1.year = 2023 and 1.region = 'east'</a:t>
+            </a:r>
+          </a:p>
+          <a:p>
+            <a:r>
+              <a:rPr lang="en-US" dirty="0"/>
+              <a:t>    2.state='TX' and  2.year = 2023 and 2.region = 'east'</a:t>
+            </a:r>
+          </a:p>
+          <a:p>
+            <a:r>
+              <a:rPr lang="en-US" dirty="0"/>
+              <a:t>    3.state='FL' and  3.year = 2023 and 3.region = 'east'</a:t>
+            </a:r>
+          </a:p>
+          <a:p>
+            <a:r>
+              <a:rPr lang="en-US" dirty="0"/>
+              <a:t>    HAVING_CONDITION(G):</a:t>
+            </a:r>
+          </a:p>
+          <a:p>
+            <a:r>
+              <a:rPr lang="en-US" dirty="0"/>
+              <a:t>    2_sum_quant &gt; 100 or 1_avg_price &lt; 50 and 3_min_quant &gt;= 5</a:t>
+            </a:r>
+          </a:p>
+          <a:p>
+            <a:r>
+              <a:rPr lang="en-US" dirty="0"/>
+              <a:t>    END</a:t>
+            </a:r>
+          </a:p>
+        </p:txBody>
+      </p:sp>
+      <p:sp>
+        <p:nvSpPr>
+          <p:cNvPr id="4" name="Content Placeholder 34">
+            <a:extLst>
+              <a:ext uri="{FF2B5EF4-FFF2-40B4-BE49-F238E27FC236}">
+                <a16:creationId xmlns:a16="http://schemas.microsoft.com/office/drawing/2014/main" id="{F185795C-91C3-C36D-797B-9E768DDD4B83}"/>
+              </a:ext>
+            </a:extLst>
+          </p:cNvPr>
+          <p:cNvSpPr txBox="1">
+            <a:spLocks/>
+          </p:cNvSpPr>
+          <p:nvPr/>
+        </p:nvSpPr>
+        <p:spPr>
+          <a:xfrm>
+            <a:off x="7301948" y="2349820"/>
+            <a:ext cx="4368248" cy="4136039"/>
+          </a:xfrm>
+          <a:prstGeom prst="rect">
+            <a:avLst/>
+          </a:prstGeom>
+        </p:spPr>
+        <p:txBody>
+          <a:bodyPr vert="horz" lIns="91440" tIns="0" rIns="91440" bIns="45720" rtlCol="0">
+            <a:normAutofit/>
+          </a:bodyPr>
+          <a:lstStyle>
+            <a:lvl1pPr marL="0" indent="0" algn="l" defTabSz="914400" rtl="0" eaLnBrk="1" latinLnBrk="0" hangingPunct="1">
+              <a:lnSpc>
+                <a:spcPct val="100000"/>
+              </a:lnSpc>
+              <a:spcBef>
+                <a:spcPts val="1000"/>
+              </a:spcBef>
+              <a:buFont typeface="Arial" panose="020B0604020202020204" pitchFamily="34" charset="0"/>
+              <a:buNone/>
+              <a:defRPr sz="1800" b="0" kern="1200" spc="50" baseline="0">
+                <a:solidFill>
+                  <a:schemeClr val="tx1"/>
+                </a:solidFill>
+                <a:latin typeface="+mn-lt"/>
+                <a:ea typeface="+mn-ea"/>
+                <a:cs typeface="+mn-cs"/>
+              </a:defRPr>
+            </a:lvl1pPr>
+            <a:lvl2pPr marL="283464" indent="-285750" algn="l" defTabSz="914400" rtl="0" eaLnBrk="1" latinLnBrk="0" hangingPunct="1">
+              <a:lnSpc>
+                <a:spcPct val="100000"/>
+              </a:lnSpc>
+              <a:spcBef>
+                <a:spcPts val="1000"/>
+              </a:spcBef>
+              <a:buFont typeface="Arial" panose="020B0604020202020204" pitchFamily="34" charset="0"/>
+              <a:buChar char="•"/>
+              <a:defRPr sz="1800" kern="1200" spc="50" baseline="0">
+                <a:solidFill>
+                  <a:schemeClr val="tx1"/>
+                </a:solidFill>
+                <a:latin typeface="+mn-lt"/>
+                <a:ea typeface="+mn-ea"/>
+                <a:cs typeface="+mn-cs"/>
+              </a:defRPr>
+            </a:lvl2pPr>
+            <a:lvl3pPr marL="566928" indent="-285750" algn="l" defTabSz="914400" rtl="0" eaLnBrk="1" latinLnBrk="0" hangingPunct="1">
+              <a:lnSpc>
+                <a:spcPct val="100000"/>
+              </a:lnSpc>
+              <a:spcBef>
+                <a:spcPts val="1000"/>
+              </a:spcBef>
+              <a:buFont typeface="Arial" panose="020B0604020202020204" pitchFamily="34" charset="0"/>
+              <a:buChar char="•"/>
+              <a:defRPr sz="1800" kern="1200" spc="50" baseline="0">
+                <a:solidFill>
+                  <a:schemeClr val="tx1"/>
+                </a:solidFill>
+                <a:latin typeface="+mn-lt"/>
+                <a:ea typeface="+mn-ea"/>
+                <a:cs typeface="+mn-cs"/>
+              </a:defRPr>
+            </a:lvl3pPr>
+            <a:lvl4pPr marL="859536" indent="-285750" algn="l" defTabSz="914400" rtl="0" eaLnBrk="1" latinLnBrk="0" hangingPunct="1">
+              <a:lnSpc>
+                <a:spcPct val="100000"/>
+              </a:lnSpc>
+              <a:spcBef>
+                <a:spcPts val="1000"/>
+              </a:spcBef>
+              <a:buFont typeface="Arial" panose="020B0604020202020204" pitchFamily="34" charset="0"/>
+              <a:buChar char="•"/>
+              <a:defRPr sz="1800" kern="1200" spc="50" baseline="0">
+                <a:solidFill>
+                  <a:schemeClr val="tx1"/>
+                </a:solidFill>
+                <a:latin typeface="+mn-lt"/>
+                <a:ea typeface="+mn-ea"/>
+                <a:cs typeface="+mn-cs"/>
+              </a:defRPr>
+            </a:lvl4pPr>
+            <a:lvl5pPr marL="1143000" indent="-285750" algn="l" defTabSz="914400" rtl="0" eaLnBrk="1" latinLnBrk="0" hangingPunct="1">
+              <a:lnSpc>
+                <a:spcPct val="100000"/>
+              </a:lnSpc>
+              <a:spcBef>
+                <a:spcPts val="1000"/>
+              </a:spcBef>
+              <a:buFont typeface="Arial" panose="020B0604020202020204" pitchFamily="34" charset="0"/>
+              <a:buChar char="•"/>
+              <a:defRPr sz="1800" kern="1200" spc="50" baseline="0">
+                <a:solidFill>
+                  <a:schemeClr val="tx1"/>
+                </a:solidFill>
+                <a:latin typeface="+mn-lt"/>
+                <a:ea typeface="+mn-ea"/>
+                <a:cs typeface="+mn-cs"/>
+              </a:defRPr>
+            </a:lvl5pPr>
+            <a:lvl6pPr marL="2514600" indent="-228600" algn="l" defTabSz="914400" rtl="0" eaLnBrk="1" latinLnBrk="0" hangingPunct="1">
+              <a:lnSpc>
+                <a:spcPct val="90000"/>
+              </a:lnSpc>
+              <a:spcBef>
+                <a:spcPts val="500"/>
+              </a:spcBef>
+              <a:buFont typeface="Arial" panose="020B0604020202020204" pitchFamily="34" charset="0"/>
+              <a:buChar char="•"/>
+              <a:defRPr sz="1800" kern="1200">
+                <a:solidFill>
+                  <a:schemeClr val="tx1"/>
+                </a:solidFill>
+                <a:latin typeface="+mn-lt"/>
+                <a:ea typeface="+mn-ea"/>
+                <a:cs typeface="+mn-cs"/>
+              </a:defRPr>
+            </a:lvl6pPr>
+            <a:lvl7pPr marL="2971800" indent="-228600" algn="l" defTabSz="914400" rtl="0" eaLnBrk="1" latinLnBrk="0" hangingPunct="1">
+              <a:lnSpc>
+                <a:spcPct val="90000"/>
+              </a:lnSpc>
+              <a:spcBef>
+                <a:spcPts val="500"/>
+              </a:spcBef>
+              <a:buFont typeface="Arial" panose="020B0604020202020204" pitchFamily="34" charset="0"/>
+              <a:buChar char="•"/>
+              <a:defRPr sz="1800" kern="1200">
+                <a:solidFill>
+                  <a:schemeClr val="tx1"/>
+                </a:solidFill>
+                <a:latin typeface="+mn-lt"/>
+                <a:ea typeface="+mn-ea"/>
+                <a:cs typeface="+mn-cs"/>
+              </a:defRPr>
+            </a:lvl7pPr>
+            <a:lvl8pPr marL="3429000" indent="-228600" algn="l" defTabSz="914400" rtl="0" eaLnBrk="1" latinLnBrk="0" hangingPunct="1">
+              <a:lnSpc>
+                <a:spcPct val="90000"/>
+              </a:lnSpc>
+              <a:spcBef>
+                <a:spcPts val="500"/>
+              </a:spcBef>
+              <a:buFont typeface="Arial" panose="020B0604020202020204" pitchFamily="34" charset="0"/>
+              <a:buChar char="•"/>
+              <a:defRPr sz="1800" kern="1200">
+                <a:solidFill>
+                  <a:schemeClr val="tx1"/>
+                </a:solidFill>
+                <a:latin typeface="+mn-lt"/>
+                <a:ea typeface="+mn-ea"/>
+                <a:cs typeface="+mn-cs"/>
+              </a:defRPr>
+            </a:lvl8pPr>
+            <a:lvl9pPr marL="3886200" indent="-228600" algn="l" defTabSz="914400" rtl="0" eaLnBrk="1" latinLnBrk="0" hangingPunct="1">
+              <a:lnSpc>
+                <a:spcPct val="90000"/>
+              </a:lnSpc>
+              <a:spcBef>
+                <a:spcPts val="500"/>
+              </a:spcBef>
+              <a:buFont typeface="Arial" panose="020B0604020202020204" pitchFamily="34" charset="0"/>
+              <a:buChar char="•"/>
+              <a:defRPr sz="1800" kern="1200">
+                <a:solidFill>
+                  <a:schemeClr val="tx1"/>
+                </a:solidFill>
+                <a:latin typeface="+mn-lt"/>
+                <a:ea typeface="+mn-ea"/>
+                <a:cs typeface="+mn-cs"/>
+              </a:defRPr>
+            </a:lvl9pPr>
+          </a:lstStyle>
+          <a:p>
+            <a:r>
+              <a:rPr lang="en-US" dirty="0"/>
+              <a:t>{'select': ['</a:t>
+            </a:r>
+            <a:r>
+              <a:rPr lang="en-US" dirty="0" err="1"/>
+              <a:t>cust</a:t>
+            </a:r>
+            <a:r>
+              <a:rPr lang="en-US" dirty="0"/>
+              <a:t>', '1_avg_price', '2_sum_quant', '3_min_quant'], 'n': '3', '</a:t>
+            </a:r>
+            <a:r>
+              <a:rPr lang="en-US" dirty="0" err="1"/>
+              <a:t>groupingAttribute</a:t>
+            </a:r>
+            <a:r>
+              <a:rPr lang="en-US" dirty="0"/>
+              <a:t>': ['</a:t>
+            </a:r>
+            <a:r>
+              <a:rPr lang="en-US" dirty="0" err="1"/>
+              <a:t>cust</a:t>
+            </a:r>
+            <a:r>
+              <a:rPr lang="en-US" dirty="0"/>
+              <a:t>'], '</a:t>
+            </a:r>
+            <a:r>
+              <a:rPr lang="en-US" dirty="0" err="1"/>
+              <a:t>f_vect</a:t>
+            </a:r>
+            <a:r>
+              <a:rPr lang="en-US" dirty="0"/>
+              <a:t>': ['1_avg_price', '2_sum_quant', '3_min_quant'], '</a:t>
+            </a:r>
+            <a:r>
+              <a:rPr lang="en-US" dirty="0" err="1"/>
+              <a:t>suchThat</a:t>
+            </a:r>
+            <a:r>
+              <a:rPr lang="en-US" dirty="0"/>
+              <a:t>': ['row["state"]=\'CA\' and  row["year"] = 2023 and row["region"] = \'east\'', 'row["state"]=\'TX\' and  row["year"] = 2023 and row["region"] = \'east\'', 'row["state"]=\'FL\' and  row["year"] = 2023 and row["region"] = \'east\''], 'having': ['values._2_sum_quant &gt; 100 or values._1_avg_price &lt; 50 and values._3_min_quant &gt;= 5']}</a:t>
+            </a:r>
+          </a:p>
+        </p:txBody>
+      </p:sp>
+      <p:sp>
+        <p:nvSpPr>
+          <p:cNvPr id="7" name="Title 1">
+            <a:extLst>
+              <a:ext uri="{FF2B5EF4-FFF2-40B4-BE49-F238E27FC236}">
+                <a16:creationId xmlns:a16="http://schemas.microsoft.com/office/drawing/2014/main" id="{FC5E26CB-747E-A0A2-1CC2-30B7BC7CBD09}"/>
+              </a:ext>
+            </a:extLst>
+          </p:cNvPr>
+          <p:cNvSpPr txBox="1">
+            <a:spLocks/>
+          </p:cNvSpPr>
+          <p:nvPr/>
+        </p:nvSpPr>
+        <p:spPr>
+          <a:xfrm>
+            <a:off x="7143752" y="1603512"/>
+            <a:ext cx="3583884" cy="510693"/>
+          </a:xfrm>
+          <a:prstGeom prst="rect">
+            <a:avLst/>
+          </a:prstGeom>
+        </p:spPr>
+        <p:txBody>
+          <a:bodyPr vert="horz" lIns="91440" tIns="45720" rIns="91440" bIns="45720" rtlCol="0" anchor="b">
+            <a:normAutofit/>
+          </a:bodyPr>
+          <a:lstStyle>
+            <a:lvl1pPr algn="l" defTabSz="914400" rtl="0" eaLnBrk="1" latinLnBrk="0" hangingPunct="1">
+              <a:lnSpc>
+                <a:spcPct val="90000"/>
+              </a:lnSpc>
+              <a:spcBef>
+                <a:spcPct val="0"/>
+              </a:spcBef>
+              <a:buNone/>
+              <a:defRPr lang="en-US" sz="2800" kern="1200" cap="all" spc="150" baseline="0" dirty="0">
+                <a:solidFill>
+                  <a:schemeClr val="tx1"/>
+                </a:solidFill>
+                <a:latin typeface="+mj-lt"/>
+                <a:ea typeface="+mj-ea"/>
+                <a:cs typeface="+mj-cs"/>
+              </a:defRPr>
+            </a:lvl1pPr>
+          </a:lstStyle>
+          <a:p>
+            <a:r>
+              <a:rPr lang="en-US" sz="2000" b="1" dirty="0">
+                <a:latin typeface="+mn-lt"/>
+              </a:rPr>
+              <a:t>Output Query</a:t>
+            </a:r>
+            <a:endParaRPr lang="en-US" sz="2000" dirty="0">
+              <a:latin typeface="+mn-lt"/>
+            </a:endParaRPr>
+          </a:p>
+        </p:txBody>
+      </p:sp>
+      <p:sp>
+        <p:nvSpPr>
+          <p:cNvPr id="11" name="Title 1">
+            <a:extLst>
+              <a:ext uri="{FF2B5EF4-FFF2-40B4-BE49-F238E27FC236}">
+                <a16:creationId xmlns:a16="http://schemas.microsoft.com/office/drawing/2014/main" id="{5080363D-D607-ACB3-4AEF-902BCCF5E2D5}"/>
+              </a:ext>
+            </a:extLst>
+          </p:cNvPr>
+          <p:cNvSpPr txBox="1">
+            <a:spLocks/>
+          </p:cNvSpPr>
+          <p:nvPr/>
+        </p:nvSpPr>
+        <p:spPr>
+          <a:xfrm>
+            <a:off x="2933701" y="1603512"/>
+            <a:ext cx="4210050" cy="503583"/>
+          </a:xfrm>
+          <a:prstGeom prst="rect">
+            <a:avLst/>
+          </a:prstGeom>
+        </p:spPr>
+        <p:txBody>
+          <a:bodyPr vert="horz" lIns="91440" tIns="45720" rIns="91440" bIns="45720" rtlCol="0" anchor="b">
+            <a:normAutofit/>
+          </a:bodyPr>
+          <a:lstStyle>
+            <a:lvl1pPr algn="l" defTabSz="914400" rtl="0" eaLnBrk="1" latinLnBrk="0" hangingPunct="1">
+              <a:lnSpc>
+                <a:spcPct val="90000"/>
+              </a:lnSpc>
+              <a:spcBef>
+                <a:spcPct val="0"/>
+              </a:spcBef>
+              <a:buNone/>
+              <a:defRPr lang="en-US" sz="2800" kern="1200" cap="all" spc="150" baseline="0" dirty="0">
+                <a:solidFill>
+                  <a:schemeClr val="tx1"/>
+                </a:solidFill>
+                <a:latin typeface="+mj-lt"/>
+                <a:ea typeface="+mj-ea"/>
+                <a:cs typeface="+mj-cs"/>
+              </a:defRPr>
+            </a:lvl1pPr>
+          </a:lstStyle>
+          <a:p>
+            <a:r>
+              <a:rPr lang="en-US" sz="2000" b="1" dirty="0">
+                <a:latin typeface="+mn-lt"/>
+              </a:rPr>
+              <a:t>Input Query</a:t>
+            </a:r>
+            <a:endParaRPr lang="en-US" sz="2000" dirty="0">
+              <a:latin typeface="+mn-lt"/>
+            </a:endParaRPr>
           </a:p>
         </p:txBody>
       </p:sp>
     </p:spTree>
     <p:extLst>
       <p:ext uri="{BB962C8B-B14F-4D97-AF65-F5344CB8AC3E}">
-        <p14:creationId xmlns:p14="http://schemas.microsoft.com/office/powerpoint/2010/main" val="3083419025"/>
+        <p14:creationId xmlns:p14="http://schemas.microsoft.com/office/powerpoint/2010/main" val="2920262410"/>
       </p:ext>
     </p:extLst>
   </p:cSld>
@@ -7451,7 +8366,13 @@
   <p:cSld>
     <p:spTree>
       <p:nvGrpSpPr>
-        <p:cNvPr id="1" name=""/>
+        <p:cNvPr id="1" name="">
+          <a:extLst>
+            <a:ext uri="{FF2B5EF4-FFF2-40B4-BE49-F238E27FC236}">
+              <a16:creationId xmlns:a16="http://schemas.microsoft.com/office/drawing/2014/main" id="{C3FA79C7-FE98-821E-F98B-17C57392C413}"/>
+            </a:ext>
+          </a:extLst>
+        </p:cNvPr>
         <p:cNvGrpSpPr/>
         <p:nvPr/>
       </p:nvGrpSpPr>
@@ -7468,7 +8389,7 @@
           <p:cNvPr id="2" name="Title 1">
             <a:extLst>
               <a:ext uri="{FF2B5EF4-FFF2-40B4-BE49-F238E27FC236}">
-                <a16:creationId xmlns:a16="http://schemas.microsoft.com/office/drawing/2014/main" id="{74AFBDAA-C8B4-46F5-9884-19C15B728D21}"/>
+                <a16:creationId xmlns:a16="http://schemas.microsoft.com/office/drawing/2014/main" id="{57FA48DB-4469-7CA3-68D3-692C4F9F0856}"/>
               </a:ext>
             </a:extLst>
           </p:cNvPr>
@@ -7479,24 +8400,29 @@
             <p:ph type="title"/>
           </p:nvPr>
         </p:nvSpPr>
-        <p:spPr/>
+        <p:spPr>
+          <a:xfrm>
+            <a:off x="2933700" y="372140"/>
+            <a:ext cx="8420100" cy="1065721"/>
+          </a:xfrm>
+        </p:spPr>
         <p:txBody>
           <a:bodyPr/>
           <a:lstStyle/>
           <a:p>
             <a:r>
               <a:rPr lang="en-US" dirty="0"/>
-              <a:t>Bugs and Errors so far</a:t>
-            </a:r>
-          </a:p>
-        </p:txBody>
-      </p:sp>
-      <p:sp>
-        <p:nvSpPr>
-          <p:cNvPr id="4" name="Slide Number Placeholder 3">
-            <a:extLst>
-              <a:ext uri="{FF2B5EF4-FFF2-40B4-BE49-F238E27FC236}">
-                <a16:creationId xmlns:a16="http://schemas.microsoft.com/office/drawing/2014/main" id="{8BDEAF9F-362D-32E6-CDB6-58F958F4583E}"/>
+              <a:t>What generator produces</a:t>
+            </a:r>
+          </a:p>
+        </p:txBody>
+      </p:sp>
+      <p:sp>
+        <p:nvSpPr>
+          <p:cNvPr id="8" name="Slide Number Placeholder 7">
+            <a:extLst>
+              <a:ext uri="{FF2B5EF4-FFF2-40B4-BE49-F238E27FC236}">
+                <a16:creationId xmlns:a16="http://schemas.microsoft.com/office/drawing/2014/main" id="{207F7E08-53CE-4182-21E3-FB8AE21B3CF6}"/>
               </a:ext>
             </a:extLst>
           </p:cNvPr>
@@ -7507,7 +8433,12 @@
             <p:ph type="sldNum" sz="quarter" idx="12"/>
           </p:nvPr>
         </p:nvSpPr>
-        <p:spPr/>
+        <p:spPr>
+          <a:xfrm>
+            <a:off x="10373350" y="6356349"/>
+            <a:ext cx="987552" cy="365125"/>
+          </a:xfrm>
+        </p:spPr>
         <p:txBody>
           <a:bodyPr/>
           <a:lstStyle/>
@@ -7521,10 +8452,460 @@
           </a:p>
         </p:txBody>
       </p:sp>
+      <p:sp>
+        <p:nvSpPr>
+          <p:cNvPr id="35" name="Content Placeholder 34">
+            <a:extLst>
+              <a:ext uri="{FF2B5EF4-FFF2-40B4-BE49-F238E27FC236}">
+                <a16:creationId xmlns:a16="http://schemas.microsoft.com/office/drawing/2014/main" id="{B4871D2B-24E8-690D-3BDA-1C8BC3EDF4AE}"/>
+              </a:ext>
+            </a:extLst>
+          </p:cNvPr>
+          <p:cNvSpPr>
+            <a:spLocks noGrp="1"/>
+          </p:cNvSpPr>
+          <p:nvPr>
+            <p:ph sz="half" idx="13"/>
+          </p:nvPr>
+        </p:nvSpPr>
+        <p:spPr>
+          <a:xfrm>
+            <a:off x="2933700" y="1634888"/>
+            <a:ext cx="3327952" cy="1780860"/>
+          </a:xfrm>
+        </p:spPr>
+        <p:txBody>
+          <a:bodyPr>
+            <a:normAutofit/>
+          </a:bodyPr>
+          <a:lstStyle/>
+          <a:p>
+            <a:r>
+              <a:rPr lang="en-US" dirty="0"/>
+              <a:t>3 parts:</a:t>
+            </a:r>
+          </a:p>
+          <a:p>
+            <a:pPr marL="285750" indent="-285750" fontAlgn="base">
+              <a:buFont typeface="Arial" panose="020B0604020202020204" pitchFamily="34" charset="0"/>
+              <a:buChar char="•"/>
+            </a:pPr>
+            <a:r>
+              <a:rPr lang="en-US" dirty="0"/>
+              <a:t>Create MF table</a:t>
+            </a:r>
+          </a:p>
+          <a:p>
+            <a:pPr marL="285750" indent="-285750" fontAlgn="base">
+              <a:buFont typeface="Arial" panose="020B0604020202020204" pitchFamily="34" charset="0"/>
+              <a:buChar char="•"/>
+            </a:pPr>
+            <a:r>
+              <a:rPr lang="en-US" dirty="0"/>
+              <a:t>Aggregate loops</a:t>
+            </a:r>
+          </a:p>
+          <a:p>
+            <a:pPr marL="285750" indent="-285750" fontAlgn="base">
+              <a:buFont typeface="Arial" panose="020B0604020202020204" pitchFamily="34" charset="0"/>
+              <a:buChar char="•"/>
+            </a:pPr>
+            <a:r>
+              <a:rPr lang="en-US" dirty="0"/>
+              <a:t>Having clause + selection</a:t>
+            </a:r>
+          </a:p>
+        </p:txBody>
+      </p:sp>
+      <p:sp>
+        <p:nvSpPr>
+          <p:cNvPr id="3" name="TextBox 2">
+            <a:extLst>
+              <a:ext uri="{FF2B5EF4-FFF2-40B4-BE49-F238E27FC236}">
+                <a16:creationId xmlns:a16="http://schemas.microsoft.com/office/drawing/2014/main" id="{16DDBA8F-914B-BEF6-0A07-BB5ECF9209C2}"/>
+              </a:ext>
+            </a:extLst>
+          </p:cNvPr>
+          <p:cNvSpPr txBox="1"/>
+          <p:nvPr/>
+        </p:nvSpPr>
+        <p:spPr>
+          <a:xfrm>
+            <a:off x="7566991" y="1634888"/>
+            <a:ext cx="3843131" cy="369332"/>
+          </a:xfrm>
+          <a:prstGeom prst="rect">
+            <a:avLst/>
+          </a:prstGeom>
+          <a:noFill/>
+        </p:spPr>
+        <p:txBody>
+          <a:bodyPr wrap="square" rtlCol="0">
+            <a:spAutoFit/>
+          </a:bodyPr>
+          <a:lstStyle/>
+          <a:p>
+            <a:pPr algn="ctr"/>
+            <a:r>
+              <a:rPr lang="en-US" dirty="0"/>
+              <a:t>MF Table</a:t>
+            </a:r>
+          </a:p>
+        </p:txBody>
+      </p:sp>
+      <p:sp>
+        <p:nvSpPr>
+          <p:cNvPr id="4" name="TextBox 3">
+            <a:extLst>
+              <a:ext uri="{FF2B5EF4-FFF2-40B4-BE49-F238E27FC236}">
+                <a16:creationId xmlns:a16="http://schemas.microsoft.com/office/drawing/2014/main" id="{74607B60-0B75-0382-041D-725DF2C7E5A0}"/>
+              </a:ext>
+            </a:extLst>
+          </p:cNvPr>
+          <p:cNvSpPr txBox="1"/>
+          <p:nvPr/>
+        </p:nvSpPr>
+        <p:spPr>
+          <a:xfrm>
+            <a:off x="6712226" y="2080591"/>
+            <a:ext cx="2546074" cy="1477328"/>
+          </a:xfrm>
+          <a:prstGeom prst="rect">
+            <a:avLst/>
+          </a:prstGeom>
+          <a:noFill/>
+        </p:spPr>
+        <p:txBody>
+          <a:bodyPr wrap="square" rtlCol="0">
+            <a:spAutoFit/>
+          </a:bodyPr>
+          <a:lstStyle/>
+          <a:p>
+            <a:r>
+              <a:rPr lang="en-US" dirty="0"/>
+              <a:t>Key</a:t>
+            </a:r>
+          </a:p>
+          <a:p>
+            <a:endParaRPr lang="en-US" dirty="0"/>
+          </a:p>
+          <a:p>
+            <a:r>
+              <a:rPr lang="en-US" dirty="0"/>
+              <a:t>(GroupingAttribute1,</a:t>
+            </a:r>
+          </a:p>
+          <a:p>
+            <a:r>
+              <a:rPr lang="en-US" dirty="0"/>
+              <a:t>GroupingAttribute2,</a:t>
+            </a:r>
+          </a:p>
+          <a:p>
+            <a:r>
+              <a:rPr lang="en-US" dirty="0"/>
+              <a:t>…)</a:t>
+            </a:r>
+          </a:p>
+        </p:txBody>
+      </p:sp>
+      <p:sp>
+        <p:nvSpPr>
+          <p:cNvPr id="5" name="TextBox 4">
+            <a:extLst>
+              <a:ext uri="{FF2B5EF4-FFF2-40B4-BE49-F238E27FC236}">
+                <a16:creationId xmlns:a16="http://schemas.microsoft.com/office/drawing/2014/main" id="{1D553465-8313-0DE5-48CF-E3ECB0D60D63}"/>
+              </a:ext>
+            </a:extLst>
+          </p:cNvPr>
+          <p:cNvSpPr txBox="1"/>
+          <p:nvPr/>
+        </p:nvSpPr>
+        <p:spPr>
+          <a:xfrm>
+            <a:off x="9488556" y="2080591"/>
+            <a:ext cx="2546074" cy="2862322"/>
+          </a:xfrm>
+          <a:prstGeom prst="rect">
+            <a:avLst/>
+          </a:prstGeom>
+          <a:noFill/>
+        </p:spPr>
+        <p:txBody>
+          <a:bodyPr wrap="square" rtlCol="0">
+            <a:spAutoFit/>
+          </a:bodyPr>
+          <a:lstStyle/>
+          <a:p>
+            <a:r>
+              <a:rPr lang="en-US" dirty="0"/>
+              <a:t>Value</a:t>
+            </a:r>
+          </a:p>
+          <a:p>
+            <a:endParaRPr lang="en-US" dirty="0"/>
+          </a:p>
+          <a:p>
+            <a:r>
+              <a:rPr lang="en-US" dirty="0"/>
+              <a:t>(aggregate1,</a:t>
+            </a:r>
+          </a:p>
+          <a:p>
+            <a:r>
+              <a:rPr lang="en-US" dirty="0"/>
+              <a:t>aggregate2,</a:t>
+            </a:r>
+          </a:p>
+          <a:p>
+            <a:r>
+              <a:rPr lang="en-US" dirty="0"/>
+              <a:t>…,</a:t>
+            </a:r>
+          </a:p>
+          <a:p>
+            <a:r>
+              <a:rPr lang="en-US" dirty="0" err="1"/>
+              <a:t>aggregateN</a:t>
+            </a:r>
+            <a:r>
+              <a:rPr lang="en-US" dirty="0"/>
+              <a:t>)</a:t>
+            </a:r>
+          </a:p>
+          <a:p>
+            <a:r>
+              <a:rPr lang="en-US" dirty="0"/>
+              <a:t>sum,</a:t>
+            </a:r>
+          </a:p>
+          <a:p>
+            <a:r>
+              <a:rPr lang="en-US" dirty="0"/>
+              <a:t>count,</a:t>
+            </a:r>
+          </a:p>
+          <a:p>
+            <a:r>
+              <a:rPr lang="en-US" dirty="0"/>
+              <a:t>max,</a:t>
+            </a:r>
+          </a:p>
+          <a:p>
+            <a:r>
+              <a:rPr lang="en-US" dirty="0"/>
+              <a:t>min,</a:t>
+            </a:r>
+            <a:endParaRPr lang="en-US" dirty="0">
+              <a:effectLst/>
+            </a:endParaRPr>
+          </a:p>
+        </p:txBody>
+      </p:sp>
+      <p:sp>
+        <p:nvSpPr>
+          <p:cNvPr id="6" name="TextBox 5">
+            <a:extLst>
+              <a:ext uri="{FF2B5EF4-FFF2-40B4-BE49-F238E27FC236}">
+                <a16:creationId xmlns:a16="http://schemas.microsoft.com/office/drawing/2014/main" id="{86BCE1E1-C96D-DF3D-91ED-42C0972D86D7}"/>
+              </a:ext>
+            </a:extLst>
+          </p:cNvPr>
+          <p:cNvSpPr txBox="1"/>
+          <p:nvPr/>
+        </p:nvSpPr>
+        <p:spPr>
+          <a:xfrm>
+            <a:off x="6897757" y="4306957"/>
+            <a:ext cx="1855304" cy="646331"/>
+          </a:xfrm>
+          <a:prstGeom prst="rect">
+            <a:avLst/>
+          </a:prstGeom>
+          <a:noFill/>
+        </p:spPr>
+        <p:txBody>
+          <a:bodyPr wrap="square" rtlCol="0">
+            <a:spAutoFit/>
+          </a:bodyPr>
+          <a:lstStyle/>
+          <a:p>
+            <a:r>
+              <a:rPr lang="en-US" dirty="0"/>
+              <a:t>Grouping Variables</a:t>
+            </a:r>
+          </a:p>
+        </p:txBody>
+      </p:sp>
+      <p:sp>
+        <p:nvSpPr>
+          <p:cNvPr id="7" name="TextBox 6">
+            <a:extLst>
+              <a:ext uri="{FF2B5EF4-FFF2-40B4-BE49-F238E27FC236}">
+                <a16:creationId xmlns:a16="http://schemas.microsoft.com/office/drawing/2014/main" id="{D0071E4D-075A-AD1E-5A19-436891B15E7E}"/>
+              </a:ext>
+            </a:extLst>
+          </p:cNvPr>
+          <p:cNvSpPr txBox="1"/>
+          <p:nvPr/>
+        </p:nvSpPr>
+        <p:spPr>
+          <a:xfrm>
+            <a:off x="9505598" y="5387009"/>
+            <a:ext cx="1855304" cy="369332"/>
+          </a:xfrm>
+          <a:prstGeom prst="rect">
+            <a:avLst/>
+          </a:prstGeom>
+          <a:noFill/>
+        </p:spPr>
+        <p:txBody>
+          <a:bodyPr wrap="square" rtlCol="0">
+            <a:spAutoFit/>
+          </a:bodyPr>
+          <a:lstStyle/>
+          <a:p>
+            <a:r>
+              <a:rPr lang="en-US" dirty="0"/>
+              <a:t>F-</a:t>
+            </a:r>
+            <a:r>
+              <a:rPr lang="en-US" dirty="0" err="1"/>
+              <a:t>vect</a:t>
+            </a:r>
+            <a:endParaRPr lang="en-US" dirty="0"/>
+          </a:p>
+        </p:txBody>
+      </p:sp>
+      <p:cxnSp>
+        <p:nvCxnSpPr>
+          <p:cNvPr id="10" name="Straight Arrow Connector 9">
+            <a:extLst>
+              <a:ext uri="{FF2B5EF4-FFF2-40B4-BE49-F238E27FC236}">
+                <a16:creationId xmlns:a16="http://schemas.microsoft.com/office/drawing/2014/main" id="{94C07B45-FD14-C655-A5CD-E666700FB8DC}"/>
+              </a:ext>
+            </a:extLst>
+          </p:cNvPr>
+          <p:cNvCxnSpPr>
+            <a:stCxn id="6" idx="0"/>
+          </p:cNvCxnSpPr>
+          <p:nvPr/>
+        </p:nvCxnSpPr>
+        <p:spPr>
+          <a:xfrm flipH="1" flipV="1">
+            <a:off x="7666383" y="3511752"/>
+            <a:ext cx="159026" cy="795205"/>
+          </a:xfrm>
+          <a:prstGeom prst="straightConnector1">
+            <a:avLst/>
+          </a:prstGeom>
+          <a:ln>
+            <a:tailEnd type="triangle"/>
+          </a:ln>
+        </p:spPr>
+        <p:style>
+          <a:lnRef idx="1">
+            <a:schemeClr val="accent1"/>
+          </a:lnRef>
+          <a:fillRef idx="0">
+            <a:schemeClr val="accent1"/>
+          </a:fillRef>
+          <a:effectRef idx="0">
+            <a:schemeClr val="accent1"/>
+          </a:effectRef>
+          <a:fontRef idx="minor">
+            <a:schemeClr val="tx1"/>
+          </a:fontRef>
+        </p:style>
+      </p:cxnSp>
+      <p:cxnSp>
+        <p:nvCxnSpPr>
+          <p:cNvPr id="14" name="Straight Arrow Connector 13">
+            <a:extLst>
+              <a:ext uri="{FF2B5EF4-FFF2-40B4-BE49-F238E27FC236}">
+                <a16:creationId xmlns:a16="http://schemas.microsoft.com/office/drawing/2014/main" id="{CD37C231-6DF4-36A7-2941-3B27433B49FC}"/>
+              </a:ext>
+            </a:extLst>
+          </p:cNvPr>
+          <p:cNvCxnSpPr>
+            <a:cxnSpLocks/>
+            <a:stCxn id="6" idx="0"/>
+          </p:cNvCxnSpPr>
+          <p:nvPr/>
+        </p:nvCxnSpPr>
+        <p:spPr>
+          <a:xfrm flipV="1">
+            <a:off x="7825409" y="3415748"/>
+            <a:ext cx="0" cy="891209"/>
+          </a:xfrm>
+          <a:prstGeom prst="straightConnector1">
+            <a:avLst/>
+          </a:prstGeom>
+          <a:ln>
+            <a:tailEnd type="triangle"/>
+          </a:ln>
+        </p:spPr>
+        <p:style>
+          <a:lnRef idx="1">
+            <a:schemeClr val="dk1"/>
+          </a:lnRef>
+          <a:fillRef idx="0">
+            <a:schemeClr val="dk1"/>
+          </a:fillRef>
+          <a:effectRef idx="0">
+            <a:schemeClr val="dk1"/>
+          </a:effectRef>
+          <a:fontRef idx="minor">
+            <a:schemeClr val="tx1"/>
+          </a:fontRef>
+        </p:style>
+      </p:cxnSp>
+      <p:cxnSp>
+        <p:nvCxnSpPr>
+          <p:cNvPr id="17" name="Straight Arrow Connector 16">
+            <a:extLst>
+              <a:ext uri="{FF2B5EF4-FFF2-40B4-BE49-F238E27FC236}">
+                <a16:creationId xmlns:a16="http://schemas.microsoft.com/office/drawing/2014/main" id="{48475577-1B38-4E08-47C7-58F73BCA29B7}"/>
+              </a:ext>
+            </a:extLst>
+          </p:cNvPr>
+          <p:cNvCxnSpPr>
+            <a:cxnSpLocks/>
+            <a:stCxn id="7" idx="0"/>
+          </p:cNvCxnSpPr>
+          <p:nvPr/>
+        </p:nvCxnSpPr>
+        <p:spPr>
+          <a:xfrm flipV="1">
+            <a:off x="10433250" y="3783496"/>
+            <a:ext cx="82350" cy="1603513"/>
+          </a:xfrm>
+          <a:prstGeom prst="straightConnector1">
+            <a:avLst/>
+          </a:prstGeom>
+          <a:ln>
+            <a:tailEnd type="triangle"/>
+          </a:ln>
+        </p:spPr>
+        <p:style>
+          <a:lnRef idx="1">
+            <a:schemeClr val="dk1"/>
+          </a:lnRef>
+          <a:fillRef idx="0">
+            <a:schemeClr val="dk1"/>
+          </a:fillRef>
+          <a:effectRef idx="0">
+            <a:schemeClr val="dk1"/>
+          </a:effectRef>
+          <a:fontRef idx="minor">
+            <a:schemeClr val="tx1"/>
+          </a:fontRef>
+        </p:style>
+      </p:cxnSp>
     </p:spTree>
     <p:extLst>
       <p:ext uri="{BB962C8B-B14F-4D97-AF65-F5344CB8AC3E}">
-        <p14:creationId xmlns:p14="http://schemas.microsoft.com/office/powerpoint/2010/main" val="2777342368"/>
+        <p14:creationId xmlns:p14="http://schemas.microsoft.com/office/powerpoint/2010/main" val="4122123581"/>
       </p:ext>
     </p:extLst>
   </p:cSld>
@@ -7556,7 +8937,7 @@
           <p:cNvPr id="2" name="Title 1">
             <a:extLst>
               <a:ext uri="{FF2B5EF4-FFF2-40B4-BE49-F238E27FC236}">
-                <a16:creationId xmlns:a16="http://schemas.microsoft.com/office/drawing/2014/main" id="{1CE9C4CE-EEB4-4BA7-C219-8F490EFFC3FD}"/>
+                <a16:creationId xmlns:a16="http://schemas.microsoft.com/office/drawing/2014/main" id="{B96D2A89-3708-298C-D6E7-F1896FD58009}"/>
               </a:ext>
             </a:extLst>
           </p:cNvPr>
@@ -7564,25 +8945,1055 @@
             <a:spLocks noGrp="1"/>
           </p:cNvSpPr>
           <p:nvPr>
-            <p:ph type="ctrTitle"/>
+            <p:ph type="title"/>
           </p:nvPr>
         </p:nvSpPr>
-        <p:spPr/>
+        <p:spPr>
+          <a:xfrm>
+            <a:off x="2933700" y="568961"/>
+            <a:ext cx="8420100" cy="935161"/>
+          </a:xfrm>
+        </p:spPr>
         <p:txBody>
           <a:bodyPr/>
           <a:lstStyle/>
           <a:p>
             <a:r>
               <a:rPr lang="en-US" dirty="0"/>
-              <a:t>Demo Time</a:t>
-            </a:r>
-          </a:p>
-        </p:txBody>
-      </p:sp>
+              <a:t>Aggregate Loops</a:t>
+            </a:r>
+          </a:p>
+        </p:txBody>
+      </p:sp>
+      <p:sp>
+        <p:nvSpPr>
+          <p:cNvPr id="4" name="Content Placeholder 3">
+            <a:extLst>
+              <a:ext uri="{FF2B5EF4-FFF2-40B4-BE49-F238E27FC236}">
+                <a16:creationId xmlns:a16="http://schemas.microsoft.com/office/drawing/2014/main" id="{5F6C2D00-D64A-A932-59B8-242137140515}"/>
+              </a:ext>
+            </a:extLst>
+          </p:cNvPr>
+          <p:cNvSpPr>
+            <a:spLocks noGrp="1"/>
+          </p:cNvSpPr>
+          <p:nvPr>
+            <p:ph sz="half" idx="13"/>
+          </p:nvPr>
+        </p:nvSpPr>
+        <p:spPr>
+          <a:xfrm>
+            <a:off x="2933700" y="1782416"/>
+            <a:ext cx="3943627" cy="4703443"/>
+          </a:xfrm>
+        </p:spPr>
+        <p:txBody>
+          <a:bodyPr/>
+          <a:lstStyle/>
+          <a:p>
+            <a:r>
+              <a:rPr lang="en-US" dirty="0"/>
+              <a:t>- Reset the temporary values in the mf table</a:t>
+            </a:r>
+          </a:p>
+          <a:p>
+            <a:r>
+              <a:rPr lang="en-US" dirty="0"/>
+              <a:t>- THEN</a:t>
+            </a:r>
+          </a:p>
+          <a:p>
+            <a:r>
+              <a:rPr lang="en-US" dirty="0"/>
+              <a:t>- match </a:t>
+            </a:r>
+            <a:r>
+              <a:rPr lang="en-US" dirty="0" err="1"/>
+              <a:t>db</a:t>
+            </a:r>
+            <a:r>
+              <a:rPr lang="en-US" dirty="0"/>
+              <a:t> rows to their </a:t>
+            </a:r>
+            <a:r>
+              <a:rPr lang="en-US" dirty="0" err="1"/>
+              <a:t>mfTable</a:t>
+            </a:r>
+            <a:r>
+              <a:rPr lang="en-US" dirty="0"/>
+              <a:t> row</a:t>
+            </a:r>
+          </a:p>
+          <a:p>
+            <a:r>
+              <a:rPr lang="en-US" dirty="0"/>
+              <a:t>- check appropriate </a:t>
+            </a:r>
+            <a:r>
+              <a:rPr lang="en-US" dirty="0" err="1"/>
+              <a:t>suchThat</a:t>
+            </a:r>
+            <a:r>
+              <a:rPr lang="en-US" dirty="0"/>
+              <a:t> condition</a:t>
+            </a:r>
+          </a:p>
+          <a:p>
+            <a:r>
+              <a:rPr lang="en-US" dirty="0"/>
+              <a:t>- update aggregates</a:t>
+            </a:r>
+          </a:p>
+          <a:p>
+            <a:endParaRPr lang="en-US" dirty="0"/>
+          </a:p>
+        </p:txBody>
+      </p:sp>
+      <p:sp>
+        <p:nvSpPr>
+          <p:cNvPr id="6" name="Content Placeholder 5">
+            <a:extLst>
+              <a:ext uri="{FF2B5EF4-FFF2-40B4-BE49-F238E27FC236}">
+                <a16:creationId xmlns:a16="http://schemas.microsoft.com/office/drawing/2014/main" id="{440CF5C8-4C20-A14F-9CF6-9D274E222530}"/>
+              </a:ext>
+            </a:extLst>
+          </p:cNvPr>
+          <p:cNvSpPr>
+            <a:spLocks noGrp="1"/>
+          </p:cNvSpPr>
+          <p:nvPr>
+            <p:ph sz="half" idx="14"/>
+          </p:nvPr>
+        </p:nvSpPr>
+        <p:spPr>
+          <a:xfrm>
+            <a:off x="8269356" y="1400509"/>
+            <a:ext cx="2958548" cy="763814"/>
+          </a:xfrm>
+        </p:spPr>
+        <p:txBody>
+          <a:bodyPr/>
+          <a:lstStyle/>
+          <a:p>
+            <a:r>
+              <a:rPr lang="nn-NO" dirty="0"/>
+              <a:t>ex: 1_avg_sum -&gt; “avg”, 1, “1_avg_sum”</a:t>
+            </a:r>
+            <a:endParaRPr lang="en-US" dirty="0"/>
+          </a:p>
+        </p:txBody>
+      </p:sp>
+      <p:sp>
+        <p:nvSpPr>
+          <p:cNvPr id="7" name="Slide Number Placeholder 6">
+            <a:extLst>
+              <a:ext uri="{FF2B5EF4-FFF2-40B4-BE49-F238E27FC236}">
+                <a16:creationId xmlns:a16="http://schemas.microsoft.com/office/drawing/2014/main" id="{F005F1AD-13B6-B6BA-3409-781D8CB4F8F6}"/>
+              </a:ext>
+            </a:extLst>
+          </p:cNvPr>
+          <p:cNvSpPr>
+            <a:spLocks noGrp="1"/>
+          </p:cNvSpPr>
+          <p:nvPr>
+            <p:ph type="sldNum" sz="quarter" idx="12"/>
+          </p:nvPr>
+        </p:nvSpPr>
+        <p:spPr/>
+        <p:txBody>
+          <a:bodyPr/>
+          <a:lstStyle/>
+          <a:p>
+            <a:fld id="{A49DFD55-3C28-40EF-9E31-A92D2E4017FF}" type="slidenum">
+              <a:rPr lang="en-US" smtClean="0"/>
+              <a:pPr/>
+              <a:t>7</a:t>
+            </a:fld>
+            <a:endParaRPr lang="en-US" dirty="0"/>
+          </a:p>
+        </p:txBody>
+      </p:sp>
+      <p:sp>
+        <p:nvSpPr>
+          <p:cNvPr id="8" name="TextBox 7">
+            <a:extLst>
+              <a:ext uri="{FF2B5EF4-FFF2-40B4-BE49-F238E27FC236}">
+                <a16:creationId xmlns:a16="http://schemas.microsoft.com/office/drawing/2014/main" id="{594835F4-A643-859F-8D54-6C0730E251DF}"/>
+              </a:ext>
+            </a:extLst>
+          </p:cNvPr>
+          <p:cNvSpPr txBox="1"/>
+          <p:nvPr/>
+        </p:nvSpPr>
+        <p:spPr>
+          <a:xfrm>
+            <a:off x="8143460" y="2335670"/>
+            <a:ext cx="3472069" cy="369332"/>
+          </a:xfrm>
+          <a:prstGeom prst="rect">
+            <a:avLst/>
+          </a:prstGeom>
+          <a:noFill/>
+        </p:spPr>
+        <p:txBody>
+          <a:bodyPr wrap="square" rtlCol="0">
+            <a:spAutoFit/>
+          </a:bodyPr>
+          <a:lstStyle/>
+          <a:p>
+            <a:r>
+              <a:rPr lang="en-US" b="1" dirty="0"/>
+              <a:t>generate(</a:t>
+            </a:r>
+            <a:r>
+              <a:rPr lang="en-US" b="1" dirty="0" err="1"/>
+              <a:t>aggType</a:t>
+            </a:r>
+            <a:r>
+              <a:rPr lang="en-US" b="1" dirty="0"/>
+              <a:t>, </a:t>
+            </a:r>
+            <a:r>
+              <a:rPr lang="en-US" b="1" dirty="0" err="1"/>
+              <a:t>iVal</a:t>
+            </a:r>
+            <a:r>
+              <a:rPr lang="en-US" b="1" dirty="0"/>
+              <a:t>, </a:t>
+            </a:r>
+            <a:r>
+              <a:rPr lang="en-US" b="1" dirty="0" err="1"/>
+              <a:t>vectVal</a:t>
+            </a:r>
+            <a:r>
+              <a:rPr lang="en-US" b="1" dirty="0"/>
+              <a:t>)</a:t>
+            </a:r>
+            <a:endParaRPr lang="en-US" dirty="0"/>
+          </a:p>
+        </p:txBody>
+      </p:sp>
+      <p:sp>
+        <p:nvSpPr>
+          <p:cNvPr id="9" name="Content Placeholder 5">
+            <a:extLst>
+              <a:ext uri="{FF2B5EF4-FFF2-40B4-BE49-F238E27FC236}">
+                <a16:creationId xmlns:a16="http://schemas.microsoft.com/office/drawing/2014/main" id="{6B056B7E-0E34-A0D2-B014-765EF86C3CF7}"/>
+              </a:ext>
+            </a:extLst>
+          </p:cNvPr>
+          <p:cNvSpPr txBox="1">
+            <a:spLocks/>
+          </p:cNvSpPr>
+          <p:nvPr/>
+        </p:nvSpPr>
+        <p:spPr>
+          <a:xfrm>
+            <a:off x="6173856" y="568961"/>
+            <a:ext cx="2035866" cy="338076"/>
+          </a:xfrm>
+          <a:prstGeom prst="rect">
+            <a:avLst/>
+          </a:prstGeom>
+        </p:spPr>
+        <p:txBody>
+          <a:bodyPr vert="horz" lIns="91440" tIns="0" rIns="91440" bIns="45720" rtlCol="0">
+            <a:normAutofit/>
+          </a:bodyPr>
+          <a:lstStyle>
+            <a:lvl1pPr marL="0" indent="0" algn="l" defTabSz="914400" rtl="0" eaLnBrk="1" latinLnBrk="0" hangingPunct="1">
+              <a:lnSpc>
+                <a:spcPct val="100000"/>
+              </a:lnSpc>
+              <a:spcBef>
+                <a:spcPts val="1000"/>
+              </a:spcBef>
+              <a:buFont typeface="Arial" panose="020B0604020202020204" pitchFamily="34" charset="0"/>
+              <a:buNone/>
+              <a:defRPr sz="1800" b="0" kern="1200" spc="50" baseline="0">
+                <a:solidFill>
+                  <a:schemeClr val="tx1"/>
+                </a:solidFill>
+                <a:latin typeface="+mn-lt"/>
+                <a:ea typeface="+mn-ea"/>
+                <a:cs typeface="+mn-cs"/>
+              </a:defRPr>
+            </a:lvl1pPr>
+            <a:lvl2pPr marL="283464" indent="-285750" algn="l" defTabSz="914400" rtl="0" eaLnBrk="1" latinLnBrk="0" hangingPunct="1">
+              <a:lnSpc>
+                <a:spcPct val="100000"/>
+              </a:lnSpc>
+              <a:spcBef>
+                <a:spcPts val="1000"/>
+              </a:spcBef>
+              <a:buFont typeface="Arial" panose="020B0604020202020204" pitchFamily="34" charset="0"/>
+              <a:buChar char="•"/>
+              <a:defRPr sz="1800" kern="1200" spc="50" baseline="0">
+                <a:solidFill>
+                  <a:schemeClr val="tx1"/>
+                </a:solidFill>
+                <a:latin typeface="+mn-lt"/>
+                <a:ea typeface="+mn-ea"/>
+                <a:cs typeface="+mn-cs"/>
+              </a:defRPr>
+            </a:lvl2pPr>
+            <a:lvl3pPr marL="566928" indent="-285750" algn="l" defTabSz="914400" rtl="0" eaLnBrk="1" latinLnBrk="0" hangingPunct="1">
+              <a:lnSpc>
+                <a:spcPct val="100000"/>
+              </a:lnSpc>
+              <a:spcBef>
+                <a:spcPts val="1000"/>
+              </a:spcBef>
+              <a:buFont typeface="Arial" panose="020B0604020202020204" pitchFamily="34" charset="0"/>
+              <a:buChar char="•"/>
+              <a:defRPr sz="1800" kern="1200" spc="50" baseline="0">
+                <a:solidFill>
+                  <a:schemeClr val="tx1"/>
+                </a:solidFill>
+                <a:latin typeface="+mn-lt"/>
+                <a:ea typeface="+mn-ea"/>
+                <a:cs typeface="+mn-cs"/>
+              </a:defRPr>
+            </a:lvl3pPr>
+            <a:lvl4pPr marL="859536" indent="-285750" algn="l" defTabSz="914400" rtl="0" eaLnBrk="1" latinLnBrk="0" hangingPunct="1">
+              <a:lnSpc>
+                <a:spcPct val="100000"/>
+              </a:lnSpc>
+              <a:spcBef>
+                <a:spcPts val="1000"/>
+              </a:spcBef>
+              <a:buFont typeface="Arial" panose="020B0604020202020204" pitchFamily="34" charset="0"/>
+              <a:buChar char="•"/>
+              <a:defRPr sz="1800" kern="1200" spc="50" baseline="0">
+                <a:solidFill>
+                  <a:schemeClr val="tx1"/>
+                </a:solidFill>
+                <a:latin typeface="+mn-lt"/>
+                <a:ea typeface="+mn-ea"/>
+                <a:cs typeface="+mn-cs"/>
+              </a:defRPr>
+            </a:lvl4pPr>
+            <a:lvl5pPr marL="1143000" indent="-285750" algn="l" defTabSz="914400" rtl="0" eaLnBrk="1" latinLnBrk="0" hangingPunct="1">
+              <a:lnSpc>
+                <a:spcPct val="100000"/>
+              </a:lnSpc>
+              <a:spcBef>
+                <a:spcPts val="1000"/>
+              </a:spcBef>
+              <a:buFont typeface="Arial" panose="020B0604020202020204" pitchFamily="34" charset="0"/>
+              <a:buChar char="•"/>
+              <a:defRPr sz="1800" kern="1200" spc="50" baseline="0">
+                <a:solidFill>
+                  <a:schemeClr val="tx1"/>
+                </a:solidFill>
+                <a:latin typeface="+mn-lt"/>
+                <a:ea typeface="+mn-ea"/>
+                <a:cs typeface="+mn-cs"/>
+              </a:defRPr>
+            </a:lvl5pPr>
+            <a:lvl6pPr marL="2514600" indent="-228600" algn="l" defTabSz="914400" rtl="0" eaLnBrk="1" latinLnBrk="0" hangingPunct="1">
+              <a:lnSpc>
+                <a:spcPct val="90000"/>
+              </a:lnSpc>
+              <a:spcBef>
+                <a:spcPts val="500"/>
+              </a:spcBef>
+              <a:buFont typeface="Arial" panose="020B0604020202020204" pitchFamily="34" charset="0"/>
+              <a:buChar char="•"/>
+              <a:defRPr sz="1800" kern="1200">
+                <a:solidFill>
+                  <a:schemeClr val="tx1"/>
+                </a:solidFill>
+                <a:latin typeface="+mn-lt"/>
+                <a:ea typeface="+mn-ea"/>
+                <a:cs typeface="+mn-cs"/>
+              </a:defRPr>
+            </a:lvl6pPr>
+            <a:lvl7pPr marL="2971800" indent="-228600" algn="l" defTabSz="914400" rtl="0" eaLnBrk="1" latinLnBrk="0" hangingPunct="1">
+              <a:lnSpc>
+                <a:spcPct val="90000"/>
+              </a:lnSpc>
+              <a:spcBef>
+                <a:spcPts val="500"/>
+              </a:spcBef>
+              <a:buFont typeface="Arial" panose="020B0604020202020204" pitchFamily="34" charset="0"/>
+              <a:buChar char="•"/>
+              <a:defRPr sz="1800" kern="1200">
+                <a:solidFill>
+                  <a:schemeClr val="tx1"/>
+                </a:solidFill>
+                <a:latin typeface="+mn-lt"/>
+                <a:ea typeface="+mn-ea"/>
+                <a:cs typeface="+mn-cs"/>
+              </a:defRPr>
+            </a:lvl7pPr>
+            <a:lvl8pPr marL="3429000" indent="-228600" algn="l" defTabSz="914400" rtl="0" eaLnBrk="1" latinLnBrk="0" hangingPunct="1">
+              <a:lnSpc>
+                <a:spcPct val="90000"/>
+              </a:lnSpc>
+              <a:spcBef>
+                <a:spcPts val="500"/>
+              </a:spcBef>
+              <a:buFont typeface="Arial" panose="020B0604020202020204" pitchFamily="34" charset="0"/>
+              <a:buChar char="•"/>
+              <a:defRPr sz="1800" kern="1200">
+                <a:solidFill>
+                  <a:schemeClr val="tx1"/>
+                </a:solidFill>
+                <a:latin typeface="+mn-lt"/>
+                <a:ea typeface="+mn-ea"/>
+                <a:cs typeface="+mn-cs"/>
+              </a:defRPr>
+            </a:lvl8pPr>
+            <a:lvl9pPr marL="3886200" indent="-228600" algn="l" defTabSz="914400" rtl="0" eaLnBrk="1" latinLnBrk="0" hangingPunct="1">
+              <a:lnSpc>
+                <a:spcPct val="90000"/>
+              </a:lnSpc>
+              <a:spcBef>
+                <a:spcPts val="500"/>
+              </a:spcBef>
+              <a:buFont typeface="Arial" panose="020B0604020202020204" pitchFamily="34" charset="0"/>
+              <a:buChar char="•"/>
+              <a:defRPr sz="1800" kern="1200">
+                <a:solidFill>
+                  <a:schemeClr val="tx1"/>
+                </a:solidFill>
+                <a:latin typeface="+mn-lt"/>
+                <a:ea typeface="+mn-ea"/>
+                <a:cs typeface="+mn-cs"/>
+              </a:defRPr>
+            </a:lvl9pPr>
+          </a:lstStyle>
+          <a:p>
+            <a:r>
+              <a:rPr lang="nn-NO" dirty="0"/>
+              <a:t>groupingAttribute</a:t>
+            </a:r>
+          </a:p>
+          <a:p>
+            <a:endParaRPr lang="en-US" dirty="0"/>
+          </a:p>
+        </p:txBody>
+      </p:sp>
+      <p:sp>
+        <p:nvSpPr>
+          <p:cNvPr id="10" name="Content Placeholder 5">
+            <a:extLst>
+              <a:ext uri="{FF2B5EF4-FFF2-40B4-BE49-F238E27FC236}">
+                <a16:creationId xmlns:a16="http://schemas.microsoft.com/office/drawing/2014/main" id="{94D0C9EE-C50D-4A4E-49B4-5FA39C72D03A}"/>
+              </a:ext>
+            </a:extLst>
+          </p:cNvPr>
+          <p:cNvSpPr txBox="1">
+            <a:spLocks/>
+          </p:cNvSpPr>
+          <p:nvPr/>
+        </p:nvSpPr>
+        <p:spPr>
+          <a:xfrm>
+            <a:off x="8441634" y="568961"/>
+            <a:ext cx="2035866" cy="338076"/>
+          </a:xfrm>
+          <a:prstGeom prst="rect">
+            <a:avLst/>
+          </a:prstGeom>
+        </p:spPr>
+        <p:txBody>
+          <a:bodyPr vert="horz" lIns="91440" tIns="0" rIns="91440" bIns="45720" rtlCol="0">
+            <a:normAutofit/>
+          </a:bodyPr>
+          <a:lstStyle>
+            <a:lvl1pPr marL="0" indent="0" algn="l" defTabSz="914400" rtl="0" eaLnBrk="1" latinLnBrk="0" hangingPunct="1">
+              <a:lnSpc>
+                <a:spcPct val="100000"/>
+              </a:lnSpc>
+              <a:spcBef>
+                <a:spcPts val="1000"/>
+              </a:spcBef>
+              <a:buFont typeface="Arial" panose="020B0604020202020204" pitchFamily="34" charset="0"/>
+              <a:buNone/>
+              <a:defRPr sz="1800" b="0" kern="1200" spc="50" baseline="0">
+                <a:solidFill>
+                  <a:schemeClr val="tx1"/>
+                </a:solidFill>
+                <a:latin typeface="+mn-lt"/>
+                <a:ea typeface="+mn-ea"/>
+                <a:cs typeface="+mn-cs"/>
+              </a:defRPr>
+            </a:lvl1pPr>
+            <a:lvl2pPr marL="283464" indent="-285750" algn="l" defTabSz="914400" rtl="0" eaLnBrk="1" latinLnBrk="0" hangingPunct="1">
+              <a:lnSpc>
+                <a:spcPct val="100000"/>
+              </a:lnSpc>
+              <a:spcBef>
+                <a:spcPts val="1000"/>
+              </a:spcBef>
+              <a:buFont typeface="Arial" panose="020B0604020202020204" pitchFamily="34" charset="0"/>
+              <a:buChar char="•"/>
+              <a:defRPr sz="1800" kern="1200" spc="50" baseline="0">
+                <a:solidFill>
+                  <a:schemeClr val="tx1"/>
+                </a:solidFill>
+                <a:latin typeface="+mn-lt"/>
+                <a:ea typeface="+mn-ea"/>
+                <a:cs typeface="+mn-cs"/>
+              </a:defRPr>
+            </a:lvl2pPr>
+            <a:lvl3pPr marL="566928" indent="-285750" algn="l" defTabSz="914400" rtl="0" eaLnBrk="1" latinLnBrk="0" hangingPunct="1">
+              <a:lnSpc>
+                <a:spcPct val="100000"/>
+              </a:lnSpc>
+              <a:spcBef>
+                <a:spcPts val="1000"/>
+              </a:spcBef>
+              <a:buFont typeface="Arial" panose="020B0604020202020204" pitchFamily="34" charset="0"/>
+              <a:buChar char="•"/>
+              <a:defRPr sz="1800" kern="1200" spc="50" baseline="0">
+                <a:solidFill>
+                  <a:schemeClr val="tx1"/>
+                </a:solidFill>
+                <a:latin typeface="+mn-lt"/>
+                <a:ea typeface="+mn-ea"/>
+                <a:cs typeface="+mn-cs"/>
+              </a:defRPr>
+            </a:lvl3pPr>
+            <a:lvl4pPr marL="859536" indent="-285750" algn="l" defTabSz="914400" rtl="0" eaLnBrk="1" latinLnBrk="0" hangingPunct="1">
+              <a:lnSpc>
+                <a:spcPct val="100000"/>
+              </a:lnSpc>
+              <a:spcBef>
+                <a:spcPts val="1000"/>
+              </a:spcBef>
+              <a:buFont typeface="Arial" panose="020B0604020202020204" pitchFamily="34" charset="0"/>
+              <a:buChar char="•"/>
+              <a:defRPr sz="1800" kern="1200" spc="50" baseline="0">
+                <a:solidFill>
+                  <a:schemeClr val="tx1"/>
+                </a:solidFill>
+                <a:latin typeface="+mn-lt"/>
+                <a:ea typeface="+mn-ea"/>
+                <a:cs typeface="+mn-cs"/>
+              </a:defRPr>
+            </a:lvl4pPr>
+            <a:lvl5pPr marL="1143000" indent="-285750" algn="l" defTabSz="914400" rtl="0" eaLnBrk="1" latinLnBrk="0" hangingPunct="1">
+              <a:lnSpc>
+                <a:spcPct val="100000"/>
+              </a:lnSpc>
+              <a:spcBef>
+                <a:spcPts val="1000"/>
+              </a:spcBef>
+              <a:buFont typeface="Arial" panose="020B0604020202020204" pitchFamily="34" charset="0"/>
+              <a:buChar char="•"/>
+              <a:defRPr sz="1800" kern="1200" spc="50" baseline="0">
+                <a:solidFill>
+                  <a:schemeClr val="tx1"/>
+                </a:solidFill>
+                <a:latin typeface="+mn-lt"/>
+                <a:ea typeface="+mn-ea"/>
+                <a:cs typeface="+mn-cs"/>
+              </a:defRPr>
+            </a:lvl5pPr>
+            <a:lvl6pPr marL="2514600" indent="-228600" algn="l" defTabSz="914400" rtl="0" eaLnBrk="1" latinLnBrk="0" hangingPunct="1">
+              <a:lnSpc>
+                <a:spcPct val="90000"/>
+              </a:lnSpc>
+              <a:spcBef>
+                <a:spcPts val="500"/>
+              </a:spcBef>
+              <a:buFont typeface="Arial" panose="020B0604020202020204" pitchFamily="34" charset="0"/>
+              <a:buChar char="•"/>
+              <a:defRPr sz="1800" kern="1200">
+                <a:solidFill>
+                  <a:schemeClr val="tx1"/>
+                </a:solidFill>
+                <a:latin typeface="+mn-lt"/>
+                <a:ea typeface="+mn-ea"/>
+                <a:cs typeface="+mn-cs"/>
+              </a:defRPr>
+            </a:lvl6pPr>
+            <a:lvl7pPr marL="2971800" indent="-228600" algn="l" defTabSz="914400" rtl="0" eaLnBrk="1" latinLnBrk="0" hangingPunct="1">
+              <a:lnSpc>
+                <a:spcPct val="90000"/>
+              </a:lnSpc>
+              <a:spcBef>
+                <a:spcPts val="500"/>
+              </a:spcBef>
+              <a:buFont typeface="Arial" panose="020B0604020202020204" pitchFamily="34" charset="0"/>
+              <a:buChar char="•"/>
+              <a:defRPr sz="1800" kern="1200">
+                <a:solidFill>
+                  <a:schemeClr val="tx1"/>
+                </a:solidFill>
+                <a:latin typeface="+mn-lt"/>
+                <a:ea typeface="+mn-ea"/>
+                <a:cs typeface="+mn-cs"/>
+              </a:defRPr>
+            </a:lvl7pPr>
+            <a:lvl8pPr marL="3429000" indent="-228600" algn="l" defTabSz="914400" rtl="0" eaLnBrk="1" latinLnBrk="0" hangingPunct="1">
+              <a:lnSpc>
+                <a:spcPct val="90000"/>
+              </a:lnSpc>
+              <a:spcBef>
+                <a:spcPts val="500"/>
+              </a:spcBef>
+              <a:buFont typeface="Arial" panose="020B0604020202020204" pitchFamily="34" charset="0"/>
+              <a:buChar char="•"/>
+              <a:defRPr sz="1800" kern="1200">
+                <a:solidFill>
+                  <a:schemeClr val="tx1"/>
+                </a:solidFill>
+                <a:latin typeface="+mn-lt"/>
+                <a:ea typeface="+mn-ea"/>
+                <a:cs typeface="+mn-cs"/>
+              </a:defRPr>
+            </a:lvl8pPr>
+            <a:lvl9pPr marL="3886200" indent="-228600" algn="l" defTabSz="914400" rtl="0" eaLnBrk="1" latinLnBrk="0" hangingPunct="1">
+              <a:lnSpc>
+                <a:spcPct val="90000"/>
+              </a:lnSpc>
+              <a:spcBef>
+                <a:spcPts val="500"/>
+              </a:spcBef>
+              <a:buFont typeface="Arial" panose="020B0604020202020204" pitchFamily="34" charset="0"/>
+              <a:buChar char="•"/>
+              <a:defRPr sz="1800" kern="1200">
+                <a:solidFill>
+                  <a:schemeClr val="tx1"/>
+                </a:solidFill>
+                <a:latin typeface="+mn-lt"/>
+                <a:ea typeface="+mn-ea"/>
+                <a:cs typeface="+mn-cs"/>
+              </a:defRPr>
+            </a:lvl9pPr>
+          </a:lstStyle>
+          <a:p>
+            <a:r>
+              <a:rPr lang="nn-NO" dirty="0"/>
+              <a:t>f_vect</a:t>
+            </a:r>
+          </a:p>
+          <a:p>
+            <a:endParaRPr lang="nn-NO" dirty="0"/>
+          </a:p>
+          <a:p>
+            <a:endParaRPr lang="en-US" dirty="0"/>
+          </a:p>
+        </p:txBody>
+      </p:sp>
+      <p:sp>
+        <p:nvSpPr>
+          <p:cNvPr id="11" name="Content Placeholder 5">
+            <a:extLst>
+              <a:ext uri="{FF2B5EF4-FFF2-40B4-BE49-F238E27FC236}">
+                <a16:creationId xmlns:a16="http://schemas.microsoft.com/office/drawing/2014/main" id="{53E8C788-7867-D08B-3994-AEB09A95A15A}"/>
+              </a:ext>
+            </a:extLst>
+          </p:cNvPr>
+          <p:cNvSpPr txBox="1">
+            <a:spLocks/>
+          </p:cNvSpPr>
+          <p:nvPr/>
+        </p:nvSpPr>
+        <p:spPr>
+          <a:xfrm>
+            <a:off x="9579663" y="3429000"/>
+            <a:ext cx="2035866" cy="338076"/>
+          </a:xfrm>
+          <a:prstGeom prst="rect">
+            <a:avLst/>
+          </a:prstGeom>
+        </p:spPr>
+        <p:txBody>
+          <a:bodyPr vert="horz" lIns="91440" tIns="0" rIns="91440" bIns="45720" rtlCol="0">
+            <a:normAutofit/>
+          </a:bodyPr>
+          <a:lstStyle>
+            <a:lvl1pPr marL="0" indent="0" algn="l" defTabSz="914400" rtl="0" eaLnBrk="1" latinLnBrk="0" hangingPunct="1">
+              <a:lnSpc>
+                <a:spcPct val="100000"/>
+              </a:lnSpc>
+              <a:spcBef>
+                <a:spcPts val="1000"/>
+              </a:spcBef>
+              <a:buFont typeface="Arial" panose="020B0604020202020204" pitchFamily="34" charset="0"/>
+              <a:buNone/>
+              <a:defRPr sz="1800" b="0" kern="1200" spc="50" baseline="0">
+                <a:solidFill>
+                  <a:schemeClr val="tx1"/>
+                </a:solidFill>
+                <a:latin typeface="+mn-lt"/>
+                <a:ea typeface="+mn-ea"/>
+                <a:cs typeface="+mn-cs"/>
+              </a:defRPr>
+            </a:lvl1pPr>
+            <a:lvl2pPr marL="283464" indent="-285750" algn="l" defTabSz="914400" rtl="0" eaLnBrk="1" latinLnBrk="0" hangingPunct="1">
+              <a:lnSpc>
+                <a:spcPct val="100000"/>
+              </a:lnSpc>
+              <a:spcBef>
+                <a:spcPts val="1000"/>
+              </a:spcBef>
+              <a:buFont typeface="Arial" panose="020B0604020202020204" pitchFamily="34" charset="0"/>
+              <a:buChar char="•"/>
+              <a:defRPr sz="1800" kern="1200" spc="50" baseline="0">
+                <a:solidFill>
+                  <a:schemeClr val="tx1"/>
+                </a:solidFill>
+                <a:latin typeface="+mn-lt"/>
+                <a:ea typeface="+mn-ea"/>
+                <a:cs typeface="+mn-cs"/>
+              </a:defRPr>
+            </a:lvl2pPr>
+            <a:lvl3pPr marL="566928" indent="-285750" algn="l" defTabSz="914400" rtl="0" eaLnBrk="1" latinLnBrk="0" hangingPunct="1">
+              <a:lnSpc>
+                <a:spcPct val="100000"/>
+              </a:lnSpc>
+              <a:spcBef>
+                <a:spcPts val="1000"/>
+              </a:spcBef>
+              <a:buFont typeface="Arial" panose="020B0604020202020204" pitchFamily="34" charset="0"/>
+              <a:buChar char="•"/>
+              <a:defRPr sz="1800" kern="1200" spc="50" baseline="0">
+                <a:solidFill>
+                  <a:schemeClr val="tx1"/>
+                </a:solidFill>
+                <a:latin typeface="+mn-lt"/>
+                <a:ea typeface="+mn-ea"/>
+                <a:cs typeface="+mn-cs"/>
+              </a:defRPr>
+            </a:lvl3pPr>
+            <a:lvl4pPr marL="859536" indent="-285750" algn="l" defTabSz="914400" rtl="0" eaLnBrk="1" latinLnBrk="0" hangingPunct="1">
+              <a:lnSpc>
+                <a:spcPct val="100000"/>
+              </a:lnSpc>
+              <a:spcBef>
+                <a:spcPts val="1000"/>
+              </a:spcBef>
+              <a:buFont typeface="Arial" panose="020B0604020202020204" pitchFamily="34" charset="0"/>
+              <a:buChar char="•"/>
+              <a:defRPr sz="1800" kern="1200" spc="50" baseline="0">
+                <a:solidFill>
+                  <a:schemeClr val="tx1"/>
+                </a:solidFill>
+                <a:latin typeface="+mn-lt"/>
+                <a:ea typeface="+mn-ea"/>
+                <a:cs typeface="+mn-cs"/>
+              </a:defRPr>
+            </a:lvl4pPr>
+            <a:lvl5pPr marL="1143000" indent="-285750" algn="l" defTabSz="914400" rtl="0" eaLnBrk="1" latinLnBrk="0" hangingPunct="1">
+              <a:lnSpc>
+                <a:spcPct val="100000"/>
+              </a:lnSpc>
+              <a:spcBef>
+                <a:spcPts val="1000"/>
+              </a:spcBef>
+              <a:buFont typeface="Arial" panose="020B0604020202020204" pitchFamily="34" charset="0"/>
+              <a:buChar char="•"/>
+              <a:defRPr sz="1800" kern="1200" spc="50" baseline="0">
+                <a:solidFill>
+                  <a:schemeClr val="tx1"/>
+                </a:solidFill>
+                <a:latin typeface="+mn-lt"/>
+                <a:ea typeface="+mn-ea"/>
+                <a:cs typeface="+mn-cs"/>
+              </a:defRPr>
+            </a:lvl5pPr>
+            <a:lvl6pPr marL="2514600" indent="-228600" algn="l" defTabSz="914400" rtl="0" eaLnBrk="1" latinLnBrk="0" hangingPunct="1">
+              <a:lnSpc>
+                <a:spcPct val="90000"/>
+              </a:lnSpc>
+              <a:spcBef>
+                <a:spcPts val="500"/>
+              </a:spcBef>
+              <a:buFont typeface="Arial" panose="020B0604020202020204" pitchFamily="34" charset="0"/>
+              <a:buChar char="•"/>
+              <a:defRPr sz="1800" kern="1200">
+                <a:solidFill>
+                  <a:schemeClr val="tx1"/>
+                </a:solidFill>
+                <a:latin typeface="+mn-lt"/>
+                <a:ea typeface="+mn-ea"/>
+                <a:cs typeface="+mn-cs"/>
+              </a:defRPr>
+            </a:lvl6pPr>
+            <a:lvl7pPr marL="2971800" indent="-228600" algn="l" defTabSz="914400" rtl="0" eaLnBrk="1" latinLnBrk="0" hangingPunct="1">
+              <a:lnSpc>
+                <a:spcPct val="90000"/>
+              </a:lnSpc>
+              <a:spcBef>
+                <a:spcPts val="500"/>
+              </a:spcBef>
+              <a:buFont typeface="Arial" panose="020B0604020202020204" pitchFamily="34" charset="0"/>
+              <a:buChar char="•"/>
+              <a:defRPr sz="1800" kern="1200">
+                <a:solidFill>
+                  <a:schemeClr val="tx1"/>
+                </a:solidFill>
+                <a:latin typeface="+mn-lt"/>
+                <a:ea typeface="+mn-ea"/>
+                <a:cs typeface="+mn-cs"/>
+              </a:defRPr>
+            </a:lvl7pPr>
+            <a:lvl8pPr marL="3429000" indent="-228600" algn="l" defTabSz="914400" rtl="0" eaLnBrk="1" latinLnBrk="0" hangingPunct="1">
+              <a:lnSpc>
+                <a:spcPct val="90000"/>
+              </a:lnSpc>
+              <a:spcBef>
+                <a:spcPts val="500"/>
+              </a:spcBef>
+              <a:buFont typeface="Arial" panose="020B0604020202020204" pitchFamily="34" charset="0"/>
+              <a:buChar char="•"/>
+              <a:defRPr sz="1800" kern="1200">
+                <a:solidFill>
+                  <a:schemeClr val="tx1"/>
+                </a:solidFill>
+                <a:latin typeface="+mn-lt"/>
+                <a:ea typeface="+mn-ea"/>
+                <a:cs typeface="+mn-cs"/>
+              </a:defRPr>
+            </a:lvl8pPr>
+            <a:lvl9pPr marL="3886200" indent="-228600" algn="l" defTabSz="914400" rtl="0" eaLnBrk="1" latinLnBrk="0" hangingPunct="1">
+              <a:lnSpc>
+                <a:spcPct val="90000"/>
+              </a:lnSpc>
+              <a:spcBef>
+                <a:spcPts val="500"/>
+              </a:spcBef>
+              <a:buFont typeface="Arial" panose="020B0604020202020204" pitchFamily="34" charset="0"/>
+              <a:buChar char="•"/>
+              <a:defRPr sz="1800" kern="1200">
+                <a:solidFill>
+                  <a:schemeClr val="tx1"/>
+                </a:solidFill>
+                <a:latin typeface="+mn-lt"/>
+                <a:ea typeface="+mn-ea"/>
+                <a:cs typeface="+mn-cs"/>
+              </a:defRPr>
+            </a:lvl9pPr>
+          </a:lstStyle>
+          <a:p>
+            <a:r>
+              <a:rPr lang="nn-NO" dirty="0"/>
+              <a:t>suchThat</a:t>
+            </a:r>
+          </a:p>
+          <a:p>
+            <a:endParaRPr lang="nn-NO" dirty="0"/>
+          </a:p>
+          <a:p>
+            <a:endParaRPr lang="en-US" dirty="0"/>
+          </a:p>
+        </p:txBody>
+      </p:sp>
+      <p:cxnSp>
+        <p:nvCxnSpPr>
+          <p:cNvPr id="13" name="Straight Arrow Connector 12">
+            <a:extLst>
+              <a:ext uri="{FF2B5EF4-FFF2-40B4-BE49-F238E27FC236}">
+                <a16:creationId xmlns:a16="http://schemas.microsoft.com/office/drawing/2014/main" id="{AEBB5C35-828C-DAC2-8F17-DF0EC5D13BCE}"/>
+              </a:ext>
+            </a:extLst>
+          </p:cNvPr>
+          <p:cNvCxnSpPr>
+            <a:stCxn id="10" idx="2"/>
+            <a:endCxn id="6" idx="0"/>
+          </p:cNvCxnSpPr>
+          <p:nvPr/>
+        </p:nvCxnSpPr>
+        <p:spPr>
+          <a:xfrm>
+            <a:off x="9459567" y="907037"/>
+            <a:ext cx="289063" cy="493472"/>
+          </a:xfrm>
+          <a:prstGeom prst="straightConnector1">
+            <a:avLst/>
+          </a:prstGeom>
+          <a:ln>
+            <a:tailEnd type="triangle"/>
+          </a:ln>
+        </p:spPr>
+        <p:style>
+          <a:lnRef idx="1">
+            <a:schemeClr val="dk1"/>
+          </a:lnRef>
+          <a:fillRef idx="0">
+            <a:schemeClr val="dk1"/>
+          </a:fillRef>
+          <a:effectRef idx="0">
+            <a:schemeClr val="dk1"/>
+          </a:effectRef>
+          <a:fontRef idx="minor">
+            <a:schemeClr val="tx1"/>
+          </a:fontRef>
+        </p:style>
+      </p:cxnSp>
+      <p:cxnSp>
+        <p:nvCxnSpPr>
+          <p:cNvPr id="15" name="Straight Arrow Connector 14">
+            <a:extLst>
+              <a:ext uri="{FF2B5EF4-FFF2-40B4-BE49-F238E27FC236}">
+                <a16:creationId xmlns:a16="http://schemas.microsoft.com/office/drawing/2014/main" id="{E4EC9C39-D1C2-9927-24AA-1C4820D2A672}"/>
+              </a:ext>
+            </a:extLst>
+          </p:cNvPr>
+          <p:cNvCxnSpPr>
+            <a:cxnSpLocks/>
+          </p:cNvCxnSpPr>
+          <p:nvPr/>
+        </p:nvCxnSpPr>
+        <p:spPr>
+          <a:xfrm flipH="1">
+            <a:off x="9627704" y="1997594"/>
+            <a:ext cx="120926" cy="387797"/>
+          </a:xfrm>
+          <a:prstGeom prst="straightConnector1">
+            <a:avLst/>
+          </a:prstGeom>
+          <a:ln>
+            <a:tailEnd type="triangle"/>
+          </a:ln>
+        </p:spPr>
+        <p:style>
+          <a:lnRef idx="1">
+            <a:schemeClr val="dk1"/>
+          </a:lnRef>
+          <a:fillRef idx="0">
+            <a:schemeClr val="dk1"/>
+          </a:fillRef>
+          <a:effectRef idx="0">
+            <a:schemeClr val="dk1"/>
+          </a:effectRef>
+          <a:fontRef idx="minor">
+            <a:schemeClr val="tx1"/>
+          </a:fontRef>
+        </p:style>
+      </p:cxnSp>
+      <p:cxnSp>
+        <p:nvCxnSpPr>
+          <p:cNvPr id="18" name="Straight Arrow Connector 17">
+            <a:extLst>
+              <a:ext uri="{FF2B5EF4-FFF2-40B4-BE49-F238E27FC236}">
+                <a16:creationId xmlns:a16="http://schemas.microsoft.com/office/drawing/2014/main" id="{905AB811-E9B1-6ED1-3029-44AC534C3A80}"/>
+              </a:ext>
+            </a:extLst>
+          </p:cNvPr>
+          <p:cNvCxnSpPr>
+            <a:stCxn id="9" idx="2"/>
+          </p:cNvCxnSpPr>
+          <p:nvPr/>
+        </p:nvCxnSpPr>
+        <p:spPr>
+          <a:xfrm>
+            <a:off x="7191789" y="907037"/>
+            <a:ext cx="1382368" cy="1478354"/>
+          </a:xfrm>
+          <a:prstGeom prst="straightConnector1">
+            <a:avLst/>
+          </a:prstGeom>
+          <a:ln>
+            <a:tailEnd type="triangle"/>
+          </a:ln>
+        </p:spPr>
+        <p:style>
+          <a:lnRef idx="1">
+            <a:schemeClr val="dk1"/>
+          </a:lnRef>
+          <a:fillRef idx="0">
+            <a:schemeClr val="dk1"/>
+          </a:fillRef>
+          <a:effectRef idx="0">
+            <a:schemeClr val="dk1"/>
+          </a:effectRef>
+          <a:fontRef idx="minor">
+            <a:schemeClr val="tx1"/>
+          </a:fontRef>
+        </p:style>
+      </p:cxnSp>
+      <p:cxnSp>
+        <p:nvCxnSpPr>
+          <p:cNvPr id="20" name="Straight Arrow Connector 19">
+            <a:extLst>
+              <a:ext uri="{FF2B5EF4-FFF2-40B4-BE49-F238E27FC236}">
+                <a16:creationId xmlns:a16="http://schemas.microsoft.com/office/drawing/2014/main" id="{C828FB63-9F2F-0178-C6C6-9EFA36F2640C}"/>
+              </a:ext>
+            </a:extLst>
+          </p:cNvPr>
+          <p:cNvCxnSpPr>
+            <a:cxnSpLocks/>
+            <a:stCxn id="8" idx="1"/>
+          </p:cNvCxnSpPr>
+          <p:nvPr/>
+        </p:nvCxnSpPr>
+        <p:spPr>
+          <a:xfrm flipH="1" flipV="1">
+            <a:off x="6096000" y="2071990"/>
+            <a:ext cx="2047460" cy="448346"/>
+          </a:xfrm>
+          <a:prstGeom prst="straightConnector1">
+            <a:avLst/>
+          </a:prstGeom>
+          <a:ln>
+            <a:tailEnd type="triangle"/>
+          </a:ln>
+        </p:spPr>
+        <p:style>
+          <a:lnRef idx="1">
+            <a:schemeClr val="dk1"/>
+          </a:lnRef>
+          <a:fillRef idx="0">
+            <a:schemeClr val="dk1"/>
+          </a:fillRef>
+          <a:effectRef idx="0">
+            <a:schemeClr val="dk1"/>
+          </a:effectRef>
+          <a:fontRef idx="minor">
+            <a:schemeClr val="tx1"/>
+          </a:fontRef>
+        </p:style>
+      </p:cxnSp>
+      <p:cxnSp>
+        <p:nvCxnSpPr>
+          <p:cNvPr id="24" name="Straight Arrow Connector 23">
+            <a:extLst>
+              <a:ext uri="{FF2B5EF4-FFF2-40B4-BE49-F238E27FC236}">
+                <a16:creationId xmlns:a16="http://schemas.microsoft.com/office/drawing/2014/main" id="{B1C70E4C-A98F-73A2-1FAA-06D26F32AE5C}"/>
+              </a:ext>
+            </a:extLst>
+          </p:cNvPr>
+          <p:cNvCxnSpPr/>
+          <p:nvPr/>
+        </p:nvCxnSpPr>
+        <p:spPr>
+          <a:xfrm flipV="1">
+            <a:off x="10197548" y="2610678"/>
+            <a:ext cx="175802" cy="818322"/>
+          </a:xfrm>
+          <a:prstGeom prst="straightConnector1">
+            <a:avLst/>
+          </a:prstGeom>
+          <a:ln>
+            <a:tailEnd type="triangle"/>
+          </a:ln>
+        </p:spPr>
+        <p:style>
+          <a:lnRef idx="1">
+            <a:schemeClr val="dk1"/>
+          </a:lnRef>
+          <a:fillRef idx="0">
+            <a:schemeClr val="dk1"/>
+          </a:fillRef>
+          <a:effectRef idx="0">
+            <a:schemeClr val="dk1"/>
+          </a:effectRef>
+          <a:fontRef idx="minor">
+            <a:schemeClr val="tx1"/>
+          </a:fontRef>
+        </p:style>
+      </p:cxnSp>
     </p:spTree>
     <p:extLst>
       <p:ext uri="{BB962C8B-B14F-4D97-AF65-F5344CB8AC3E}">
-        <p14:creationId xmlns:p14="http://schemas.microsoft.com/office/powerpoint/2010/main" val="2513671328"/>
+        <p14:creationId xmlns:p14="http://schemas.microsoft.com/office/powerpoint/2010/main" val="1947017453"/>
       </p:ext>
     </p:extLst>
   </p:cSld>
@@ -7593,6 +10004,896 @@
 </file>
 
 <file path=ppt/slides/slide8.xml><?xml version="1.0" encoding="utf-8"?>
+<p:sld xmlns:a="http://schemas.openxmlformats.org/drawingml/2006/main" xmlns:r="http://schemas.openxmlformats.org/officeDocument/2006/relationships" xmlns:p="http://schemas.openxmlformats.org/presentationml/2006/main">
+  <p:cSld>
+    <p:spTree>
+      <p:nvGrpSpPr>
+        <p:cNvPr id="1" name="">
+          <a:extLst>
+            <a:ext uri="{FF2B5EF4-FFF2-40B4-BE49-F238E27FC236}">
+              <a16:creationId xmlns:a16="http://schemas.microsoft.com/office/drawing/2014/main" id="{53D0E77A-8B1F-F0A4-88D5-87C0E188CB1C}"/>
+            </a:ext>
+          </a:extLst>
+        </p:cNvPr>
+        <p:cNvGrpSpPr/>
+        <p:nvPr/>
+      </p:nvGrpSpPr>
+      <p:grpSpPr>
+        <a:xfrm>
+          <a:off x="0" y="0"/>
+          <a:ext cx="0" cy="0"/>
+          <a:chOff x="0" y="0"/>
+          <a:chExt cx="0" cy="0"/>
+        </a:xfrm>
+      </p:grpSpPr>
+      <p:sp>
+        <p:nvSpPr>
+          <p:cNvPr id="2" name="Title 1">
+            <a:extLst>
+              <a:ext uri="{FF2B5EF4-FFF2-40B4-BE49-F238E27FC236}">
+                <a16:creationId xmlns:a16="http://schemas.microsoft.com/office/drawing/2014/main" id="{E7899D05-7F0A-AF32-4B56-CBDE5F1FFCDE}"/>
+              </a:ext>
+            </a:extLst>
+          </p:cNvPr>
+          <p:cNvSpPr>
+            <a:spLocks noGrp="1"/>
+          </p:cNvSpPr>
+          <p:nvPr>
+            <p:ph type="title"/>
+          </p:nvPr>
+        </p:nvSpPr>
+        <p:spPr>
+          <a:xfrm>
+            <a:off x="2933700" y="568961"/>
+            <a:ext cx="8420100" cy="935161"/>
+          </a:xfrm>
+        </p:spPr>
+        <p:txBody>
+          <a:bodyPr/>
+          <a:lstStyle/>
+          <a:p>
+            <a:r>
+              <a:rPr lang="en-US" dirty="0"/>
+              <a:t>Having Clause + Selection</a:t>
+            </a:r>
+          </a:p>
+        </p:txBody>
+      </p:sp>
+      <p:sp>
+        <p:nvSpPr>
+          <p:cNvPr id="4" name="Content Placeholder 3">
+            <a:extLst>
+              <a:ext uri="{FF2B5EF4-FFF2-40B4-BE49-F238E27FC236}">
+                <a16:creationId xmlns:a16="http://schemas.microsoft.com/office/drawing/2014/main" id="{7B84B948-F375-1C5B-8DEB-4226C18C802D}"/>
+              </a:ext>
+            </a:extLst>
+          </p:cNvPr>
+          <p:cNvSpPr>
+            <a:spLocks noGrp="1"/>
+          </p:cNvSpPr>
+          <p:nvPr>
+            <p:ph sz="half" idx="13"/>
+          </p:nvPr>
+        </p:nvSpPr>
+        <p:spPr>
+          <a:xfrm>
+            <a:off x="2933700" y="1782416"/>
+            <a:ext cx="3699013" cy="3319671"/>
+          </a:xfrm>
+        </p:spPr>
+        <p:txBody>
+          <a:bodyPr/>
+          <a:lstStyle/>
+          <a:p>
+            <a:r>
+              <a:rPr lang="en-US" dirty="0"/>
+              <a:t>- loop over our mf table and filter everything by our having clause</a:t>
+            </a:r>
+          </a:p>
+          <a:p>
+            <a:r>
+              <a:rPr lang="en-US" dirty="0"/>
+              <a:t>- create an array for our new row</a:t>
+            </a:r>
+          </a:p>
+          <a:p>
+            <a:r>
+              <a:rPr lang="en-US" dirty="0"/>
+              <a:t>- iterate over our filtered mf table</a:t>
+            </a:r>
+          </a:p>
+          <a:p>
+            <a:r>
+              <a:rPr lang="en-US" dirty="0"/>
+              <a:t>- add selection value to row</a:t>
+            </a:r>
+          </a:p>
+          <a:p>
+            <a:r>
+              <a:rPr lang="en-US" dirty="0"/>
+              <a:t>- return our array</a:t>
+            </a:r>
+          </a:p>
+          <a:p>
+            <a:endParaRPr lang="en-US" dirty="0"/>
+          </a:p>
+        </p:txBody>
+      </p:sp>
+      <p:sp>
+        <p:nvSpPr>
+          <p:cNvPr id="7" name="Slide Number Placeholder 6">
+            <a:extLst>
+              <a:ext uri="{FF2B5EF4-FFF2-40B4-BE49-F238E27FC236}">
+                <a16:creationId xmlns:a16="http://schemas.microsoft.com/office/drawing/2014/main" id="{175545B5-8498-4A9E-71C3-803EB64852F1}"/>
+              </a:ext>
+            </a:extLst>
+          </p:cNvPr>
+          <p:cNvSpPr>
+            <a:spLocks noGrp="1"/>
+          </p:cNvSpPr>
+          <p:nvPr>
+            <p:ph type="sldNum" sz="quarter" idx="12"/>
+          </p:nvPr>
+        </p:nvSpPr>
+        <p:spPr/>
+        <p:txBody>
+          <a:bodyPr/>
+          <a:lstStyle/>
+          <a:p>
+            <a:fld id="{A49DFD55-3C28-40EF-9E31-A92D2E4017FF}" type="slidenum">
+              <a:rPr lang="en-US" smtClean="0"/>
+              <a:pPr/>
+              <a:t>8</a:t>
+            </a:fld>
+            <a:endParaRPr lang="en-US" dirty="0"/>
+          </a:p>
+        </p:txBody>
+      </p:sp>
+      <p:sp>
+        <p:nvSpPr>
+          <p:cNvPr id="12" name="Content Placeholder 3">
+            <a:extLst>
+              <a:ext uri="{FF2B5EF4-FFF2-40B4-BE49-F238E27FC236}">
+                <a16:creationId xmlns:a16="http://schemas.microsoft.com/office/drawing/2014/main" id="{5C05D6F3-9FF8-B979-3248-46E784BBDBD6}"/>
+              </a:ext>
+            </a:extLst>
+          </p:cNvPr>
+          <p:cNvSpPr txBox="1">
+            <a:spLocks/>
+          </p:cNvSpPr>
+          <p:nvPr/>
+        </p:nvSpPr>
+        <p:spPr>
+          <a:xfrm>
+            <a:off x="7507357" y="2093843"/>
+            <a:ext cx="1007165" cy="337931"/>
+          </a:xfrm>
+          <a:prstGeom prst="rect">
+            <a:avLst/>
+          </a:prstGeom>
+        </p:spPr>
+        <p:txBody>
+          <a:bodyPr vert="horz" lIns="91440" tIns="0" rIns="91440" bIns="45720" rtlCol="0">
+            <a:normAutofit/>
+          </a:bodyPr>
+          <a:lstStyle>
+            <a:lvl1pPr marL="0" indent="0" algn="l" defTabSz="914400" rtl="0" eaLnBrk="1" latinLnBrk="0" hangingPunct="1">
+              <a:lnSpc>
+                <a:spcPct val="100000"/>
+              </a:lnSpc>
+              <a:spcBef>
+                <a:spcPts val="1000"/>
+              </a:spcBef>
+              <a:buFont typeface="Arial" panose="020B0604020202020204" pitchFamily="34" charset="0"/>
+              <a:buNone/>
+              <a:defRPr sz="1800" b="0" kern="1200" spc="50" baseline="0">
+                <a:solidFill>
+                  <a:schemeClr val="tx1"/>
+                </a:solidFill>
+                <a:latin typeface="+mn-lt"/>
+                <a:ea typeface="+mn-ea"/>
+                <a:cs typeface="+mn-cs"/>
+              </a:defRPr>
+            </a:lvl1pPr>
+            <a:lvl2pPr marL="283464" indent="-285750" algn="l" defTabSz="914400" rtl="0" eaLnBrk="1" latinLnBrk="0" hangingPunct="1">
+              <a:lnSpc>
+                <a:spcPct val="100000"/>
+              </a:lnSpc>
+              <a:spcBef>
+                <a:spcPts val="1000"/>
+              </a:spcBef>
+              <a:buFont typeface="Arial" panose="020B0604020202020204" pitchFamily="34" charset="0"/>
+              <a:buChar char="•"/>
+              <a:defRPr sz="1800" kern="1200" spc="50" baseline="0">
+                <a:solidFill>
+                  <a:schemeClr val="tx1"/>
+                </a:solidFill>
+                <a:latin typeface="+mn-lt"/>
+                <a:ea typeface="+mn-ea"/>
+                <a:cs typeface="+mn-cs"/>
+              </a:defRPr>
+            </a:lvl2pPr>
+            <a:lvl3pPr marL="566928" indent="-285750" algn="l" defTabSz="914400" rtl="0" eaLnBrk="1" latinLnBrk="0" hangingPunct="1">
+              <a:lnSpc>
+                <a:spcPct val="100000"/>
+              </a:lnSpc>
+              <a:spcBef>
+                <a:spcPts val="1000"/>
+              </a:spcBef>
+              <a:buFont typeface="Arial" panose="020B0604020202020204" pitchFamily="34" charset="0"/>
+              <a:buChar char="•"/>
+              <a:defRPr sz="1800" kern="1200" spc="50" baseline="0">
+                <a:solidFill>
+                  <a:schemeClr val="tx1"/>
+                </a:solidFill>
+                <a:latin typeface="+mn-lt"/>
+                <a:ea typeface="+mn-ea"/>
+                <a:cs typeface="+mn-cs"/>
+              </a:defRPr>
+            </a:lvl3pPr>
+            <a:lvl4pPr marL="859536" indent="-285750" algn="l" defTabSz="914400" rtl="0" eaLnBrk="1" latinLnBrk="0" hangingPunct="1">
+              <a:lnSpc>
+                <a:spcPct val="100000"/>
+              </a:lnSpc>
+              <a:spcBef>
+                <a:spcPts val="1000"/>
+              </a:spcBef>
+              <a:buFont typeface="Arial" panose="020B0604020202020204" pitchFamily="34" charset="0"/>
+              <a:buChar char="•"/>
+              <a:defRPr sz="1800" kern="1200" spc="50" baseline="0">
+                <a:solidFill>
+                  <a:schemeClr val="tx1"/>
+                </a:solidFill>
+                <a:latin typeface="+mn-lt"/>
+                <a:ea typeface="+mn-ea"/>
+                <a:cs typeface="+mn-cs"/>
+              </a:defRPr>
+            </a:lvl4pPr>
+            <a:lvl5pPr marL="1143000" indent="-285750" algn="l" defTabSz="914400" rtl="0" eaLnBrk="1" latinLnBrk="0" hangingPunct="1">
+              <a:lnSpc>
+                <a:spcPct val="100000"/>
+              </a:lnSpc>
+              <a:spcBef>
+                <a:spcPts val="1000"/>
+              </a:spcBef>
+              <a:buFont typeface="Arial" panose="020B0604020202020204" pitchFamily="34" charset="0"/>
+              <a:buChar char="•"/>
+              <a:defRPr sz="1800" kern="1200" spc="50" baseline="0">
+                <a:solidFill>
+                  <a:schemeClr val="tx1"/>
+                </a:solidFill>
+                <a:latin typeface="+mn-lt"/>
+                <a:ea typeface="+mn-ea"/>
+                <a:cs typeface="+mn-cs"/>
+              </a:defRPr>
+            </a:lvl5pPr>
+            <a:lvl6pPr marL="2514600" indent="-228600" algn="l" defTabSz="914400" rtl="0" eaLnBrk="1" latinLnBrk="0" hangingPunct="1">
+              <a:lnSpc>
+                <a:spcPct val="90000"/>
+              </a:lnSpc>
+              <a:spcBef>
+                <a:spcPts val="500"/>
+              </a:spcBef>
+              <a:buFont typeface="Arial" panose="020B0604020202020204" pitchFamily="34" charset="0"/>
+              <a:buChar char="•"/>
+              <a:defRPr sz="1800" kern="1200">
+                <a:solidFill>
+                  <a:schemeClr val="tx1"/>
+                </a:solidFill>
+                <a:latin typeface="+mn-lt"/>
+                <a:ea typeface="+mn-ea"/>
+                <a:cs typeface="+mn-cs"/>
+              </a:defRPr>
+            </a:lvl6pPr>
+            <a:lvl7pPr marL="2971800" indent="-228600" algn="l" defTabSz="914400" rtl="0" eaLnBrk="1" latinLnBrk="0" hangingPunct="1">
+              <a:lnSpc>
+                <a:spcPct val="90000"/>
+              </a:lnSpc>
+              <a:spcBef>
+                <a:spcPts val="500"/>
+              </a:spcBef>
+              <a:buFont typeface="Arial" panose="020B0604020202020204" pitchFamily="34" charset="0"/>
+              <a:buChar char="•"/>
+              <a:defRPr sz="1800" kern="1200">
+                <a:solidFill>
+                  <a:schemeClr val="tx1"/>
+                </a:solidFill>
+                <a:latin typeface="+mn-lt"/>
+                <a:ea typeface="+mn-ea"/>
+                <a:cs typeface="+mn-cs"/>
+              </a:defRPr>
+            </a:lvl7pPr>
+            <a:lvl8pPr marL="3429000" indent="-228600" algn="l" defTabSz="914400" rtl="0" eaLnBrk="1" latinLnBrk="0" hangingPunct="1">
+              <a:lnSpc>
+                <a:spcPct val="90000"/>
+              </a:lnSpc>
+              <a:spcBef>
+                <a:spcPts val="500"/>
+              </a:spcBef>
+              <a:buFont typeface="Arial" panose="020B0604020202020204" pitchFamily="34" charset="0"/>
+              <a:buChar char="•"/>
+              <a:defRPr sz="1800" kern="1200">
+                <a:solidFill>
+                  <a:schemeClr val="tx1"/>
+                </a:solidFill>
+                <a:latin typeface="+mn-lt"/>
+                <a:ea typeface="+mn-ea"/>
+                <a:cs typeface="+mn-cs"/>
+              </a:defRPr>
+            </a:lvl8pPr>
+            <a:lvl9pPr marL="3886200" indent="-228600" algn="l" defTabSz="914400" rtl="0" eaLnBrk="1" latinLnBrk="0" hangingPunct="1">
+              <a:lnSpc>
+                <a:spcPct val="90000"/>
+              </a:lnSpc>
+              <a:spcBef>
+                <a:spcPts val="500"/>
+              </a:spcBef>
+              <a:buFont typeface="Arial" panose="020B0604020202020204" pitchFamily="34" charset="0"/>
+              <a:buChar char="•"/>
+              <a:defRPr sz="1800" kern="1200">
+                <a:solidFill>
+                  <a:schemeClr val="tx1"/>
+                </a:solidFill>
+                <a:latin typeface="+mn-lt"/>
+                <a:ea typeface="+mn-ea"/>
+                <a:cs typeface="+mn-cs"/>
+              </a:defRPr>
+            </a:lvl9pPr>
+          </a:lstStyle>
+          <a:p>
+            <a:r>
+              <a:rPr lang="en-US" dirty="0"/>
+              <a:t>Having</a:t>
+            </a:r>
+          </a:p>
+          <a:p>
+            <a:endParaRPr lang="en-US" dirty="0"/>
+          </a:p>
+        </p:txBody>
+      </p:sp>
+      <p:sp>
+        <p:nvSpPr>
+          <p:cNvPr id="14" name="Content Placeholder 3">
+            <a:extLst>
+              <a:ext uri="{FF2B5EF4-FFF2-40B4-BE49-F238E27FC236}">
+                <a16:creationId xmlns:a16="http://schemas.microsoft.com/office/drawing/2014/main" id="{4F10AA7C-DF0C-EABC-3A78-C1D9F479DF7B}"/>
+              </a:ext>
+            </a:extLst>
+          </p:cNvPr>
+          <p:cNvSpPr txBox="1">
+            <a:spLocks/>
+          </p:cNvSpPr>
+          <p:nvPr/>
+        </p:nvSpPr>
+        <p:spPr>
+          <a:xfrm>
+            <a:off x="7507356" y="2683564"/>
+            <a:ext cx="1007165" cy="337931"/>
+          </a:xfrm>
+          <a:prstGeom prst="rect">
+            <a:avLst/>
+          </a:prstGeom>
+        </p:spPr>
+        <p:txBody>
+          <a:bodyPr vert="horz" lIns="91440" tIns="0" rIns="91440" bIns="45720" rtlCol="0">
+            <a:normAutofit/>
+          </a:bodyPr>
+          <a:lstStyle>
+            <a:lvl1pPr marL="0" indent="0" algn="l" defTabSz="914400" rtl="0" eaLnBrk="1" latinLnBrk="0" hangingPunct="1">
+              <a:lnSpc>
+                <a:spcPct val="100000"/>
+              </a:lnSpc>
+              <a:spcBef>
+                <a:spcPts val="1000"/>
+              </a:spcBef>
+              <a:buFont typeface="Arial" panose="020B0604020202020204" pitchFamily="34" charset="0"/>
+              <a:buNone/>
+              <a:defRPr sz="1800" b="0" kern="1200" spc="50" baseline="0">
+                <a:solidFill>
+                  <a:schemeClr val="tx1"/>
+                </a:solidFill>
+                <a:latin typeface="+mn-lt"/>
+                <a:ea typeface="+mn-ea"/>
+                <a:cs typeface="+mn-cs"/>
+              </a:defRPr>
+            </a:lvl1pPr>
+            <a:lvl2pPr marL="283464" indent="-285750" algn="l" defTabSz="914400" rtl="0" eaLnBrk="1" latinLnBrk="0" hangingPunct="1">
+              <a:lnSpc>
+                <a:spcPct val="100000"/>
+              </a:lnSpc>
+              <a:spcBef>
+                <a:spcPts val="1000"/>
+              </a:spcBef>
+              <a:buFont typeface="Arial" panose="020B0604020202020204" pitchFamily="34" charset="0"/>
+              <a:buChar char="•"/>
+              <a:defRPr sz="1800" kern="1200" spc="50" baseline="0">
+                <a:solidFill>
+                  <a:schemeClr val="tx1"/>
+                </a:solidFill>
+                <a:latin typeface="+mn-lt"/>
+                <a:ea typeface="+mn-ea"/>
+                <a:cs typeface="+mn-cs"/>
+              </a:defRPr>
+            </a:lvl2pPr>
+            <a:lvl3pPr marL="566928" indent="-285750" algn="l" defTabSz="914400" rtl="0" eaLnBrk="1" latinLnBrk="0" hangingPunct="1">
+              <a:lnSpc>
+                <a:spcPct val="100000"/>
+              </a:lnSpc>
+              <a:spcBef>
+                <a:spcPts val="1000"/>
+              </a:spcBef>
+              <a:buFont typeface="Arial" panose="020B0604020202020204" pitchFamily="34" charset="0"/>
+              <a:buChar char="•"/>
+              <a:defRPr sz="1800" kern="1200" spc="50" baseline="0">
+                <a:solidFill>
+                  <a:schemeClr val="tx1"/>
+                </a:solidFill>
+                <a:latin typeface="+mn-lt"/>
+                <a:ea typeface="+mn-ea"/>
+                <a:cs typeface="+mn-cs"/>
+              </a:defRPr>
+            </a:lvl3pPr>
+            <a:lvl4pPr marL="859536" indent="-285750" algn="l" defTabSz="914400" rtl="0" eaLnBrk="1" latinLnBrk="0" hangingPunct="1">
+              <a:lnSpc>
+                <a:spcPct val="100000"/>
+              </a:lnSpc>
+              <a:spcBef>
+                <a:spcPts val="1000"/>
+              </a:spcBef>
+              <a:buFont typeface="Arial" panose="020B0604020202020204" pitchFamily="34" charset="0"/>
+              <a:buChar char="•"/>
+              <a:defRPr sz="1800" kern="1200" spc="50" baseline="0">
+                <a:solidFill>
+                  <a:schemeClr val="tx1"/>
+                </a:solidFill>
+                <a:latin typeface="+mn-lt"/>
+                <a:ea typeface="+mn-ea"/>
+                <a:cs typeface="+mn-cs"/>
+              </a:defRPr>
+            </a:lvl4pPr>
+            <a:lvl5pPr marL="1143000" indent="-285750" algn="l" defTabSz="914400" rtl="0" eaLnBrk="1" latinLnBrk="0" hangingPunct="1">
+              <a:lnSpc>
+                <a:spcPct val="100000"/>
+              </a:lnSpc>
+              <a:spcBef>
+                <a:spcPts val="1000"/>
+              </a:spcBef>
+              <a:buFont typeface="Arial" panose="020B0604020202020204" pitchFamily="34" charset="0"/>
+              <a:buChar char="•"/>
+              <a:defRPr sz="1800" kern="1200" spc="50" baseline="0">
+                <a:solidFill>
+                  <a:schemeClr val="tx1"/>
+                </a:solidFill>
+                <a:latin typeface="+mn-lt"/>
+                <a:ea typeface="+mn-ea"/>
+                <a:cs typeface="+mn-cs"/>
+              </a:defRPr>
+            </a:lvl5pPr>
+            <a:lvl6pPr marL="2514600" indent="-228600" algn="l" defTabSz="914400" rtl="0" eaLnBrk="1" latinLnBrk="0" hangingPunct="1">
+              <a:lnSpc>
+                <a:spcPct val="90000"/>
+              </a:lnSpc>
+              <a:spcBef>
+                <a:spcPts val="500"/>
+              </a:spcBef>
+              <a:buFont typeface="Arial" panose="020B0604020202020204" pitchFamily="34" charset="0"/>
+              <a:buChar char="•"/>
+              <a:defRPr sz="1800" kern="1200">
+                <a:solidFill>
+                  <a:schemeClr val="tx1"/>
+                </a:solidFill>
+                <a:latin typeface="+mn-lt"/>
+                <a:ea typeface="+mn-ea"/>
+                <a:cs typeface="+mn-cs"/>
+              </a:defRPr>
+            </a:lvl6pPr>
+            <a:lvl7pPr marL="2971800" indent="-228600" algn="l" defTabSz="914400" rtl="0" eaLnBrk="1" latinLnBrk="0" hangingPunct="1">
+              <a:lnSpc>
+                <a:spcPct val="90000"/>
+              </a:lnSpc>
+              <a:spcBef>
+                <a:spcPts val="500"/>
+              </a:spcBef>
+              <a:buFont typeface="Arial" panose="020B0604020202020204" pitchFamily="34" charset="0"/>
+              <a:buChar char="•"/>
+              <a:defRPr sz="1800" kern="1200">
+                <a:solidFill>
+                  <a:schemeClr val="tx1"/>
+                </a:solidFill>
+                <a:latin typeface="+mn-lt"/>
+                <a:ea typeface="+mn-ea"/>
+                <a:cs typeface="+mn-cs"/>
+              </a:defRPr>
+            </a:lvl7pPr>
+            <a:lvl8pPr marL="3429000" indent="-228600" algn="l" defTabSz="914400" rtl="0" eaLnBrk="1" latinLnBrk="0" hangingPunct="1">
+              <a:lnSpc>
+                <a:spcPct val="90000"/>
+              </a:lnSpc>
+              <a:spcBef>
+                <a:spcPts val="500"/>
+              </a:spcBef>
+              <a:buFont typeface="Arial" panose="020B0604020202020204" pitchFamily="34" charset="0"/>
+              <a:buChar char="•"/>
+              <a:defRPr sz="1800" kern="1200">
+                <a:solidFill>
+                  <a:schemeClr val="tx1"/>
+                </a:solidFill>
+                <a:latin typeface="+mn-lt"/>
+                <a:ea typeface="+mn-ea"/>
+                <a:cs typeface="+mn-cs"/>
+              </a:defRPr>
+            </a:lvl8pPr>
+            <a:lvl9pPr marL="3886200" indent="-228600" algn="l" defTabSz="914400" rtl="0" eaLnBrk="1" latinLnBrk="0" hangingPunct="1">
+              <a:lnSpc>
+                <a:spcPct val="90000"/>
+              </a:lnSpc>
+              <a:spcBef>
+                <a:spcPts val="500"/>
+              </a:spcBef>
+              <a:buFont typeface="Arial" panose="020B0604020202020204" pitchFamily="34" charset="0"/>
+              <a:buChar char="•"/>
+              <a:defRPr sz="1800" kern="1200">
+                <a:solidFill>
+                  <a:schemeClr val="tx1"/>
+                </a:solidFill>
+                <a:latin typeface="+mn-lt"/>
+                <a:ea typeface="+mn-ea"/>
+                <a:cs typeface="+mn-cs"/>
+              </a:defRPr>
+            </a:lvl9pPr>
+          </a:lstStyle>
+          <a:p>
+            <a:r>
+              <a:rPr lang="en-US" dirty="0"/>
+              <a:t>Select</a:t>
+            </a:r>
+          </a:p>
+          <a:p>
+            <a:endParaRPr lang="en-US" dirty="0"/>
+          </a:p>
+        </p:txBody>
+      </p:sp>
+      <p:sp>
+        <p:nvSpPr>
+          <p:cNvPr id="16" name="Content Placeholder 3">
+            <a:extLst>
+              <a:ext uri="{FF2B5EF4-FFF2-40B4-BE49-F238E27FC236}">
+                <a16:creationId xmlns:a16="http://schemas.microsoft.com/office/drawing/2014/main" id="{6FFD54D1-0135-8C08-1BE5-045185C6CCBC}"/>
+              </a:ext>
+            </a:extLst>
+          </p:cNvPr>
+          <p:cNvSpPr txBox="1">
+            <a:spLocks/>
+          </p:cNvSpPr>
+          <p:nvPr/>
+        </p:nvSpPr>
+        <p:spPr>
+          <a:xfrm>
+            <a:off x="7507356" y="3933548"/>
+            <a:ext cx="2186609" cy="337931"/>
+          </a:xfrm>
+          <a:prstGeom prst="rect">
+            <a:avLst/>
+          </a:prstGeom>
+        </p:spPr>
+        <p:txBody>
+          <a:bodyPr vert="horz" lIns="91440" tIns="0" rIns="91440" bIns="45720" rtlCol="0">
+            <a:normAutofit fontScale="25000" lnSpcReduction="20000"/>
+          </a:bodyPr>
+          <a:lstStyle>
+            <a:lvl1pPr marL="0" indent="0" algn="l" defTabSz="914400" rtl="0" eaLnBrk="1" latinLnBrk="0" hangingPunct="1">
+              <a:lnSpc>
+                <a:spcPct val="100000"/>
+              </a:lnSpc>
+              <a:spcBef>
+                <a:spcPts val="1000"/>
+              </a:spcBef>
+              <a:buFont typeface="Arial" panose="020B0604020202020204" pitchFamily="34" charset="0"/>
+              <a:buNone/>
+              <a:defRPr sz="1800" b="0" kern="1200" spc="50" baseline="0">
+                <a:solidFill>
+                  <a:schemeClr val="tx1"/>
+                </a:solidFill>
+                <a:latin typeface="+mn-lt"/>
+                <a:ea typeface="+mn-ea"/>
+                <a:cs typeface="+mn-cs"/>
+              </a:defRPr>
+            </a:lvl1pPr>
+            <a:lvl2pPr marL="283464" indent="-285750" algn="l" defTabSz="914400" rtl="0" eaLnBrk="1" latinLnBrk="0" hangingPunct="1">
+              <a:lnSpc>
+                <a:spcPct val="100000"/>
+              </a:lnSpc>
+              <a:spcBef>
+                <a:spcPts val="1000"/>
+              </a:spcBef>
+              <a:buFont typeface="Arial" panose="020B0604020202020204" pitchFamily="34" charset="0"/>
+              <a:buChar char="•"/>
+              <a:defRPr sz="1800" kern="1200" spc="50" baseline="0">
+                <a:solidFill>
+                  <a:schemeClr val="tx1"/>
+                </a:solidFill>
+                <a:latin typeface="+mn-lt"/>
+                <a:ea typeface="+mn-ea"/>
+                <a:cs typeface="+mn-cs"/>
+              </a:defRPr>
+            </a:lvl2pPr>
+            <a:lvl3pPr marL="566928" indent="-285750" algn="l" defTabSz="914400" rtl="0" eaLnBrk="1" latinLnBrk="0" hangingPunct="1">
+              <a:lnSpc>
+                <a:spcPct val="100000"/>
+              </a:lnSpc>
+              <a:spcBef>
+                <a:spcPts val="1000"/>
+              </a:spcBef>
+              <a:buFont typeface="Arial" panose="020B0604020202020204" pitchFamily="34" charset="0"/>
+              <a:buChar char="•"/>
+              <a:defRPr sz="1800" kern="1200" spc="50" baseline="0">
+                <a:solidFill>
+                  <a:schemeClr val="tx1"/>
+                </a:solidFill>
+                <a:latin typeface="+mn-lt"/>
+                <a:ea typeface="+mn-ea"/>
+                <a:cs typeface="+mn-cs"/>
+              </a:defRPr>
+            </a:lvl3pPr>
+            <a:lvl4pPr marL="859536" indent="-285750" algn="l" defTabSz="914400" rtl="0" eaLnBrk="1" latinLnBrk="0" hangingPunct="1">
+              <a:lnSpc>
+                <a:spcPct val="100000"/>
+              </a:lnSpc>
+              <a:spcBef>
+                <a:spcPts val="1000"/>
+              </a:spcBef>
+              <a:buFont typeface="Arial" panose="020B0604020202020204" pitchFamily="34" charset="0"/>
+              <a:buChar char="•"/>
+              <a:defRPr sz="1800" kern="1200" spc="50" baseline="0">
+                <a:solidFill>
+                  <a:schemeClr val="tx1"/>
+                </a:solidFill>
+                <a:latin typeface="+mn-lt"/>
+                <a:ea typeface="+mn-ea"/>
+                <a:cs typeface="+mn-cs"/>
+              </a:defRPr>
+            </a:lvl4pPr>
+            <a:lvl5pPr marL="1143000" indent="-285750" algn="l" defTabSz="914400" rtl="0" eaLnBrk="1" latinLnBrk="0" hangingPunct="1">
+              <a:lnSpc>
+                <a:spcPct val="100000"/>
+              </a:lnSpc>
+              <a:spcBef>
+                <a:spcPts val="1000"/>
+              </a:spcBef>
+              <a:buFont typeface="Arial" panose="020B0604020202020204" pitchFamily="34" charset="0"/>
+              <a:buChar char="•"/>
+              <a:defRPr sz="1800" kern="1200" spc="50" baseline="0">
+                <a:solidFill>
+                  <a:schemeClr val="tx1"/>
+                </a:solidFill>
+                <a:latin typeface="+mn-lt"/>
+                <a:ea typeface="+mn-ea"/>
+                <a:cs typeface="+mn-cs"/>
+              </a:defRPr>
+            </a:lvl5pPr>
+            <a:lvl6pPr marL="2514600" indent="-228600" algn="l" defTabSz="914400" rtl="0" eaLnBrk="1" latinLnBrk="0" hangingPunct="1">
+              <a:lnSpc>
+                <a:spcPct val="90000"/>
+              </a:lnSpc>
+              <a:spcBef>
+                <a:spcPts val="500"/>
+              </a:spcBef>
+              <a:buFont typeface="Arial" panose="020B0604020202020204" pitchFamily="34" charset="0"/>
+              <a:buChar char="•"/>
+              <a:defRPr sz="1800" kern="1200">
+                <a:solidFill>
+                  <a:schemeClr val="tx1"/>
+                </a:solidFill>
+                <a:latin typeface="+mn-lt"/>
+                <a:ea typeface="+mn-ea"/>
+                <a:cs typeface="+mn-cs"/>
+              </a:defRPr>
+            </a:lvl6pPr>
+            <a:lvl7pPr marL="2971800" indent="-228600" algn="l" defTabSz="914400" rtl="0" eaLnBrk="1" latinLnBrk="0" hangingPunct="1">
+              <a:lnSpc>
+                <a:spcPct val="90000"/>
+              </a:lnSpc>
+              <a:spcBef>
+                <a:spcPts val="500"/>
+              </a:spcBef>
+              <a:buFont typeface="Arial" panose="020B0604020202020204" pitchFamily="34" charset="0"/>
+              <a:buChar char="•"/>
+              <a:defRPr sz="1800" kern="1200">
+                <a:solidFill>
+                  <a:schemeClr val="tx1"/>
+                </a:solidFill>
+                <a:latin typeface="+mn-lt"/>
+                <a:ea typeface="+mn-ea"/>
+                <a:cs typeface="+mn-cs"/>
+              </a:defRPr>
+            </a:lvl7pPr>
+            <a:lvl8pPr marL="3429000" indent="-228600" algn="l" defTabSz="914400" rtl="0" eaLnBrk="1" latinLnBrk="0" hangingPunct="1">
+              <a:lnSpc>
+                <a:spcPct val="90000"/>
+              </a:lnSpc>
+              <a:spcBef>
+                <a:spcPts val="500"/>
+              </a:spcBef>
+              <a:buFont typeface="Arial" panose="020B0604020202020204" pitchFamily="34" charset="0"/>
+              <a:buChar char="•"/>
+              <a:defRPr sz="1800" kern="1200">
+                <a:solidFill>
+                  <a:schemeClr val="tx1"/>
+                </a:solidFill>
+                <a:latin typeface="+mn-lt"/>
+                <a:ea typeface="+mn-ea"/>
+                <a:cs typeface="+mn-cs"/>
+              </a:defRPr>
+            </a:lvl8pPr>
+            <a:lvl9pPr marL="3886200" indent="-228600" algn="l" defTabSz="914400" rtl="0" eaLnBrk="1" latinLnBrk="0" hangingPunct="1">
+              <a:lnSpc>
+                <a:spcPct val="90000"/>
+              </a:lnSpc>
+              <a:spcBef>
+                <a:spcPts val="500"/>
+              </a:spcBef>
+              <a:buFont typeface="Arial" panose="020B0604020202020204" pitchFamily="34" charset="0"/>
+              <a:buChar char="•"/>
+              <a:defRPr sz="1800" kern="1200">
+                <a:solidFill>
+                  <a:schemeClr val="tx1"/>
+                </a:solidFill>
+                <a:latin typeface="+mn-lt"/>
+                <a:ea typeface="+mn-ea"/>
+                <a:cs typeface="+mn-cs"/>
+              </a:defRPr>
+            </a:lvl9pPr>
+          </a:lstStyle>
+          <a:p>
+            <a:r>
+              <a:rPr lang="en-US" sz="7200" dirty="0" err="1"/>
+              <a:t>groupingAttribute</a:t>
+            </a:r>
+            <a:endParaRPr lang="en-US" sz="7200" dirty="0"/>
+          </a:p>
+          <a:p>
+            <a:endParaRPr lang="en-US" dirty="0"/>
+          </a:p>
+        </p:txBody>
+      </p:sp>
+      <p:cxnSp>
+        <p:nvCxnSpPr>
+          <p:cNvPr id="19" name="Straight Arrow Connector 18">
+            <a:extLst>
+              <a:ext uri="{FF2B5EF4-FFF2-40B4-BE49-F238E27FC236}">
+                <a16:creationId xmlns:a16="http://schemas.microsoft.com/office/drawing/2014/main" id="{9AC3E457-61D5-1DBA-F53D-DFEE252FEF30}"/>
+              </a:ext>
+            </a:extLst>
+          </p:cNvPr>
+          <p:cNvCxnSpPr>
+            <a:stCxn id="12" idx="1"/>
+          </p:cNvCxnSpPr>
+          <p:nvPr/>
+        </p:nvCxnSpPr>
+        <p:spPr>
+          <a:xfrm flipH="1" flipV="1">
+            <a:off x="6036365" y="2027583"/>
+            <a:ext cx="1470992" cy="235226"/>
+          </a:xfrm>
+          <a:prstGeom prst="straightConnector1">
+            <a:avLst/>
+          </a:prstGeom>
+          <a:ln>
+            <a:tailEnd type="triangle"/>
+          </a:ln>
+        </p:spPr>
+        <p:style>
+          <a:lnRef idx="1">
+            <a:schemeClr val="dk1"/>
+          </a:lnRef>
+          <a:fillRef idx="0">
+            <a:schemeClr val="dk1"/>
+          </a:fillRef>
+          <a:effectRef idx="0">
+            <a:schemeClr val="dk1"/>
+          </a:effectRef>
+          <a:fontRef idx="minor">
+            <a:schemeClr val="tx1"/>
+          </a:fontRef>
+        </p:style>
+      </p:cxnSp>
+      <p:cxnSp>
+        <p:nvCxnSpPr>
+          <p:cNvPr id="22" name="Straight Arrow Connector 21">
+            <a:extLst>
+              <a:ext uri="{FF2B5EF4-FFF2-40B4-BE49-F238E27FC236}">
+                <a16:creationId xmlns:a16="http://schemas.microsoft.com/office/drawing/2014/main" id="{BFC102E3-4556-EF18-B2A1-CB94BC100BA5}"/>
+              </a:ext>
+            </a:extLst>
+          </p:cNvPr>
+          <p:cNvCxnSpPr>
+            <a:stCxn id="14" idx="1"/>
+          </p:cNvCxnSpPr>
+          <p:nvPr/>
+        </p:nvCxnSpPr>
+        <p:spPr>
+          <a:xfrm flipH="1">
+            <a:off x="6155635" y="2852530"/>
+            <a:ext cx="1351721" cy="420757"/>
+          </a:xfrm>
+          <a:prstGeom prst="straightConnector1">
+            <a:avLst/>
+          </a:prstGeom>
+          <a:ln>
+            <a:tailEnd type="triangle"/>
+          </a:ln>
+        </p:spPr>
+        <p:style>
+          <a:lnRef idx="1">
+            <a:schemeClr val="dk1"/>
+          </a:lnRef>
+          <a:fillRef idx="0">
+            <a:schemeClr val="dk1"/>
+          </a:fillRef>
+          <a:effectRef idx="0">
+            <a:schemeClr val="dk1"/>
+          </a:effectRef>
+          <a:fontRef idx="minor">
+            <a:schemeClr val="tx1"/>
+          </a:fontRef>
+        </p:style>
+      </p:cxnSp>
+      <p:cxnSp>
+        <p:nvCxnSpPr>
+          <p:cNvPr id="25" name="Straight Arrow Connector 24">
+            <a:extLst>
+              <a:ext uri="{FF2B5EF4-FFF2-40B4-BE49-F238E27FC236}">
+                <a16:creationId xmlns:a16="http://schemas.microsoft.com/office/drawing/2014/main" id="{E73C1A4E-11D8-048F-DA78-BE4E1B92CF0A}"/>
+              </a:ext>
+            </a:extLst>
+          </p:cNvPr>
+          <p:cNvCxnSpPr>
+            <a:cxnSpLocks/>
+            <a:stCxn id="16" idx="1"/>
+          </p:cNvCxnSpPr>
+          <p:nvPr/>
+        </p:nvCxnSpPr>
+        <p:spPr>
+          <a:xfrm flipH="1" flipV="1">
+            <a:off x="5970104" y="3933548"/>
+            <a:ext cx="1537252" cy="168966"/>
+          </a:xfrm>
+          <a:prstGeom prst="straightConnector1">
+            <a:avLst/>
+          </a:prstGeom>
+          <a:ln>
+            <a:tailEnd type="triangle"/>
+          </a:ln>
+        </p:spPr>
+        <p:style>
+          <a:lnRef idx="1">
+            <a:schemeClr val="dk1"/>
+          </a:lnRef>
+          <a:fillRef idx="0">
+            <a:schemeClr val="dk1"/>
+          </a:fillRef>
+          <a:effectRef idx="0">
+            <a:schemeClr val="dk1"/>
+          </a:effectRef>
+          <a:fontRef idx="minor">
+            <a:schemeClr val="tx1"/>
+          </a:fontRef>
+        </p:style>
+      </p:cxnSp>
+    </p:spTree>
+    <p:extLst>
+      <p:ext uri="{BB962C8B-B14F-4D97-AF65-F5344CB8AC3E}">
+        <p14:creationId xmlns:p14="http://schemas.microsoft.com/office/powerpoint/2010/main" val="925956136"/>
+      </p:ext>
+    </p:extLst>
+  </p:cSld>
+  <p:clrMapOvr>
+    <a:masterClrMapping/>
+  </p:clrMapOvr>
+</p:sld>
+</file>
+
+<file path=ppt/slides/slide9.xml><?xml version="1.0" encoding="utf-8"?>
 <p:sld xmlns:a="http://schemas.openxmlformats.org/drawingml/2006/main" xmlns:r="http://schemas.openxmlformats.org/officeDocument/2006/relationships" xmlns:p="http://schemas.openxmlformats.org/presentationml/2006/main">
   <p:cSld>
     <p:spTree>
@@ -7611,10 +10912,10 @@
       </p:grpSpPr>
       <p:sp>
         <p:nvSpPr>
-          <p:cNvPr id="2" name="Title 1">
-            <a:extLst>
-              <a:ext uri="{FF2B5EF4-FFF2-40B4-BE49-F238E27FC236}">
-                <a16:creationId xmlns:a16="http://schemas.microsoft.com/office/drawing/2014/main" id="{F7412623-7646-70A5-1983-06EA443E1CA9}"/>
+          <p:cNvPr id="5" name="Title 4">
+            <a:extLst>
+              <a:ext uri="{FF2B5EF4-FFF2-40B4-BE49-F238E27FC236}">
+                <a16:creationId xmlns:a16="http://schemas.microsoft.com/office/drawing/2014/main" id="{1BBBFCE1-CF2C-D025-61FF-603A99A64B63}"/>
               </a:ext>
             </a:extLst>
           </p:cNvPr>
@@ -7632,17 +10933,17 @@
           <a:p>
             <a:r>
               <a:rPr lang="en-US" dirty="0"/>
-              <a:t>Summary</a:t>
-            </a:r>
-          </a:p>
-        </p:txBody>
-      </p:sp>
-      <p:sp>
-        <p:nvSpPr>
-          <p:cNvPr id="6" name="Text Placeholder 5">
-            <a:extLst>
-              <a:ext uri="{FF2B5EF4-FFF2-40B4-BE49-F238E27FC236}">
-                <a16:creationId xmlns:a16="http://schemas.microsoft.com/office/drawing/2014/main" id="{C61CA0EF-192C-A468-9A6D-58F30EA65412}"/>
+              <a:t>Tech Stack</a:t>
+            </a:r>
+          </a:p>
+        </p:txBody>
+      </p:sp>
+      <p:sp>
+        <p:nvSpPr>
+          <p:cNvPr id="6" name="Picture Placeholder 5">
+            <a:extLst>
+              <a:ext uri="{FF2B5EF4-FFF2-40B4-BE49-F238E27FC236}">
+                <a16:creationId xmlns:a16="http://schemas.microsoft.com/office/drawing/2014/main" id="{C50CAE42-9734-8964-8A40-34797844D033}"/>
               </a:ext>
             </a:extLst>
           </p:cNvPr>
@@ -7650,7 +10951,25 @@
             <a:spLocks noGrp="1"/>
           </p:cNvSpPr>
           <p:nvPr>
-            <p:ph type="body" idx="1"/>
+            <p:ph type="pic" sz="quarter" idx="13"/>
+          </p:nvPr>
+        </p:nvSpPr>
+        <p:spPr/>
+      </p:sp>
+      <p:sp>
+        <p:nvSpPr>
+          <p:cNvPr id="4" name="Slide Number Placeholder 3">
+            <a:extLst>
+              <a:ext uri="{FF2B5EF4-FFF2-40B4-BE49-F238E27FC236}">
+                <a16:creationId xmlns:a16="http://schemas.microsoft.com/office/drawing/2014/main" id="{97C2AED4-F61D-7674-0A42-124FAECEFCAA}"/>
+              </a:ext>
+            </a:extLst>
+          </p:cNvPr>
+          <p:cNvSpPr>
+            <a:spLocks noGrp="1"/>
+          </p:cNvSpPr>
+          <p:nvPr>
+            <p:ph type="sldNum" sz="quarter" idx="12"/>
           </p:nvPr>
         </p:nvSpPr>
         <p:spPr/>
@@ -7658,7 +10977,12 @@
           <a:bodyPr/>
           <a:lstStyle/>
           <a:p>
-            <a:endParaRPr lang="en-US"/>
+            <a:fld id="{A49DFD55-3C28-40EF-9E31-A92D2E4017FF}" type="slidenum">
+              <a:rPr lang="en-US" smtClean="0"/>
+              <a:pPr/>
+              <a:t>9</a:t>
+            </a:fld>
+            <a:endParaRPr lang="en-US" dirty="0"/>
           </a:p>
         </p:txBody>
       </p:sp>
@@ -7667,32 +10991,7 @@
           <p:cNvPr id="7" name="Content Placeholder 6">
             <a:extLst>
               <a:ext uri="{FF2B5EF4-FFF2-40B4-BE49-F238E27FC236}">
-                <a16:creationId xmlns:a16="http://schemas.microsoft.com/office/drawing/2014/main" id="{AA6EA2AD-4304-C831-16D1-C48E08A1B23C}"/>
-              </a:ext>
-            </a:extLst>
-          </p:cNvPr>
-          <p:cNvSpPr>
-            <a:spLocks noGrp="1"/>
-          </p:cNvSpPr>
-          <p:nvPr>
-            <p:ph sz="half" idx="2"/>
-          </p:nvPr>
-        </p:nvSpPr>
-        <p:spPr/>
-        <p:txBody>
-          <a:bodyPr/>
-          <a:lstStyle/>
-          <a:p>
-            <a:endParaRPr lang="en-US"/>
-          </a:p>
-        </p:txBody>
-      </p:sp>
-      <p:sp>
-        <p:nvSpPr>
-          <p:cNvPr id="9" name="Content Placeholder 8">
-            <a:extLst>
-              <a:ext uri="{FF2B5EF4-FFF2-40B4-BE49-F238E27FC236}">
-                <a16:creationId xmlns:a16="http://schemas.microsoft.com/office/drawing/2014/main" id="{38E0DC34-9DFC-2F04-205B-8217310DD7D9}"/>
+                <a16:creationId xmlns:a16="http://schemas.microsoft.com/office/drawing/2014/main" id="{D8789ECB-A140-2302-E85D-9BE9AA6A268D}"/>
               </a:ext>
             </a:extLst>
           </p:cNvPr>
@@ -7705,57 +11004,32 @@
         </p:nvSpPr>
         <p:spPr/>
         <p:txBody>
-          <a:bodyPr/>
+          <a:bodyPr>
+            <a:normAutofit lnSpcReduction="10000"/>
+          </a:bodyPr>
           <a:lstStyle/>
           <a:p>
             <a:r>
               <a:rPr lang="en-US" dirty="0"/>
-              <a:t>For Future improvements we have such features in mind:</a:t>
-            </a:r>
-          </a:p>
-          <a:p>
-            <a:pPr marL="285750" indent="-285750">
-              <a:buFont typeface="Arial" panose="020B0604020202020204" pitchFamily="34" charset="0"/>
-              <a:buChar char="•"/>
-            </a:pPr>
-            <a:endParaRPr lang="en-US" dirty="0"/>
-          </a:p>
-        </p:txBody>
-      </p:sp>
-      <p:sp>
-        <p:nvSpPr>
-          <p:cNvPr id="4" name="Slide Number Placeholder 3">
-            <a:extLst>
-              <a:ext uri="{FF2B5EF4-FFF2-40B4-BE49-F238E27FC236}">
-                <a16:creationId xmlns:a16="http://schemas.microsoft.com/office/drawing/2014/main" id="{B80C01E3-CE51-B37E-504A-7D98F3620525}"/>
-              </a:ext>
-            </a:extLst>
-          </p:cNvPr>
-          <p:cNvSpPr>
-            <a:spLocks noGrp="1"/>
-          </p:cNvSpPr>
-          <p:nvPr>
-            <p:ph type="sldNum" sz="quarter" idx="12"/>
-          </p:nvPr>
-        </p:nvSpPr>
-        <p:spPr/>
-        <p:txBody>
-          <a:bodyPr/>
-          <a:lstStyle/>
-          <a:p>
-            <a:fld id="{A49DFD55-3C28-40EF-9E31-A92D2E4017FF}" type="slidenum">
-              <a:rPr lang="en-US" smtClean="0"/>
-              <a:pPr/>
-              <a:t>8</a:t>
-            </a:fld>
-            <a:endParaRPr lang="en-US" dirty="0"/>
+              <a:t>Python: Used to implement the query-processing parser, syntax validation pipeline, helper utilities, and SQL normalization logic. Python was chosen due to its lightweight syntax and strong support for structured string processing.</a:t>
+            </a:r>
+          </a:p>
+          <a:p>
+            <a:r>
+              <a:rPr lang="en-US" dirty="0" err="1"/>
+              <a:t>Dataclasses</a:t>
+            </a:r>
+            <a:r>
+              <a:rPr lang="en-US" dirty="0"/>
+              <a:t> Library: Used to model aggregate tokens through structured objects containing grouping variables, aggregation functions, attributes, and normalized SQL representations.</a:t>
+            </a:r>
           </a:p>
         </p:txBody>
       </p:sp>
     </p:spTree>
     <p:extLst>
       <p:ext uri="{BB962C8B-B14F-4D97-AF65-F5344CB8AC3E}">
-        <p14:creationId xmlns:p14="http://schemas.microsoft.com/office/powerpoint/2010/main" val="918505780"/>
+        <p14:creationId xmlns:p14="http://schemas.microsoft.com/office/powerpoint/2010/main" val="3083419025"/>
       </p:ext>
     </p:extLst>
   </p:cSld>
@@ -8557,15 +11831,6 @@
 </file>
 
 <file path=customXml/item1.xml><?xml version="1.0" encoding="utf-8"?>
-<?mso-contentType ?>
-<FormTemplates xmlns="http://schemas.microsoft.com/sharepoint/v3/contenttype/forms">
-  <Display>DocumentLibraryForm</Display>
-  <Edit>DocumentLibraryForm</Edit>
-  <New>DocumentLibraryForm</New>
-</FormTemplates>
-</file>
-
-<file path=customXml/item2.xml><?xml version="1.0" encoding="utf-8"?>
 <ct:contentTypeSchema xmlns:ct="http://schemas.microsoft.com/office/2006/metadata/contentType" xmlns:ma="http://schemas.microsoft.com/office/2006/metadata/properties/metaAttributes" ct:_="" ma:_="" ma:contentTypeName="Document" ma:contentTypeID="0x01010079F111ED35F8CC479449609E8A0923A6" ma:contentTypeVersion="28" ma:contentTypeDescription="Create a new document." ma:contentTypeScope="" ma:versionID="60f5a4f2d2b0abadcf532d48ebf9cb71">
   <xsd:schema xmlns:xsd="http://www.w3.org/2001/XMLSchema" xmlns:xs="http://www.w3.org/2001/XMLSchema" xmlns:p="http://schemas.microsoft.com/office/2006/metadata/properties" xmlns:ns1="http://schemas.microsoft.com/sharepoint/v3" xmlns:ns2="71af3243-3dd4-4a8d-8c0d-dd76da1f02a5" xmlns:ns3="16c05727-aa75-4e4a-9b5f-8a80a1165891" xmlns:ns4="230e9df3-be65-4c73-a93b-d1236ebd677e" targetNamespace="http://schemas.microsoft.com/office/2006/metadata/properties" ma:root="true" ma:fieldsID="7dd78129e6a1811f84807ad11c651531" ns1:_="" ns2:_="" ns3:_="" ns4:_="">
     <xsd:import namespace="http://schemas.microsoft.com/sharepoint/v3"/>
@@ -8877,6 +12142,15 @@
 </ct:contentTypeSchema>
 </file>
 
+<file path=customXml/item2.xml><?xml version="1.0" encoding="utf-8"?>
+<?mso-contentType ?>
+<FormTemplates xmlns="http://schemas.microsoft.com/sharepoint/v3/contenttype/forms">
+  <Display>DocumentLibraryForm</Display>
+  <Edit>DocumentLibraryForm</Edit>
+  <New>DocumentLibraryForm</New>
+</FormTemplates>
+</file>
+
 <file path=customXml/item3.xml><?xml version="1.0" encoding="utf-8"?>
 <p:properties xmlns:p="http://schemas.microsoft.com/office/2006/metadata/properties" xmlns:xsi="http://www.w3.org/2001/XMLSchema-instance" xmlns:pc="http://schemas.microsoft.com/office/infopath/2007/PartnerControls">
   <documentManagement>
@@ -8898,14 +12172,6 @@
 </file>
 
 <file path=customXml/itemProps1.xml><?xml version="1.0" encoding="utf-8"?>
-<ds:datastoreItem xmlns:ds="http://schemas.openxmlformats.org/officeDocument/2006/customXml" ds:itemID="{CABF691C-888B-4061-8A6F-D5CE84A0254B}">
-  <ds:schemaRefs>
-    <ds:schemaRef ds:uri="http://schemas.microsoft.com/sharepoint/v3/contenttype/forms"/>
-  </ds:schemaRefs>
-</ds:datastoreItem>
-</file>
-
-<file path=customXml/itemProps2.xml><?xml version="1.0" encoding="utf-8"?>
 <ds:datastoreItem xmlns:ds="http://schemas.openxmlformats.org/officeDocument/2006/customXml" ds:itemID="{5EDE3176-A15D-46A3-BDDB-64A0D7363224}">
   <ds:schemaRefs>
     <ds:schemaRef ds:uri="http://schemas.microsoft.com/office/2006/metadata/contentType"/>
@@ -8926,6 +12192,14 @@
 </ds:datastoreItem>
 </file>
 
+<file path=customXml/itemProps2.xml><?xml version="1.0" encoding="utf-8"?>
+<ds:datastoreItem xmlns:ds="http://schemas.openxmlformats.org/officeDocument/2006/customXml" ds:itemID="{CABF691C-888B-4061-8A6F-D5CE84A0254B}">
+  <ds:schemaRefs>
+    <ds:schemaRef ds:uri="http://schemas.microsoft.com/sharepoint/v3/contenttype/forms"/>
+  </ds:schemaRefs>
+</ds:datastoreItem>
+</file>
+
 <file path=customXml/itemProps3.xml><?xml version="1.0" encoding="utf-8"?>
 <ds:datastoreItem xmlns:ds="http://schemas.openxmlformats.org/officeDocument/2006/customXml" ds:itemID="{49168DCE-134F-4610-A6AA-88CEBE8D71D2}">
   <ds:schemaRefs>

--- a/Team Amaan Presents.pptx
+++ b/Team Amaan Presents.pptx
@@ -226,7 +226,7 @@
           <a:p>
             <a:fld id="{B56F32FC-4BD9-442A-A8C6-51598C909FE3}" type="datetimeFigureOut">
               <a:rPr lang="en-US" smtClean="0"/>
-              <a:t>5/8/2026</a:t>
+              <a:t>5/9/2026</a:t>
             </a:fld>
             <a:endParaRPr lang="en-US" dirty="0"/>
           </a:p>
@@ -403,7 +403,7 @@
           <a:p>
             <a:fld id="{056371FA-A98D-41E8-93F4-09945841298A}" type="datetimeFigureOut">
               <a:rPr lang="en-US" smtClean="0"/>
-              <a:t>5/8/2026</a:t>
+              <a:t>5/9/2026</a:t>
             </a:fld>
             <a:endParaRPr lang="en-US" dirty="0"/>
           </a:p>
@@ -6861,31 +6861,6 @@
       </p:sp>
       <p:sp>
         <p:nvSpPr>
-          <p:cNvPr id="6" name="Text Placeholder 5">
-            <a:extLst>
-              <a:ext uri="{FF2B5EF4-FFF2-40B4-BE49-F238E27FC236}">
-                <a16:creationId xmlns:a16="http://schemas.microsoft.com/office/drawing/2014/main" id="{C61CA0EF-192C-A468-9A6D-58F30EA65412}"/>
-              </a:ext>
-            </a:extLst>
-          </p:cNvPr>
-          <p:cNvSpPr>
-            <a:spLocks noGrp="1"/>
-          </p:cNvSpPr>
-          <p:nvPr>
-            <p:ph type="body" idx="1"/>
-          </p:nvPr>
-        </p:nvSpPr>
-        <p:spPr/>
-        <p:txBody>
-          <a:bodyPr/>
-          <a:lstStyle/>
-          <a:p>
-            <a:endParaRPr lang="en-US"/>
-          </a:p>
-        </p:txBody>
-      </p:sp>
-      <p:sp>
-        <p:nvSpPr>
           <p:cNvPr id="7" name="Content Placeholder 6">
             <a:extLst>
               <a:ext uri="{FF2B5EF4-FFF2-40B4-BE49-F238E27FC236}">
@@ -6900,12 +6875,32 @@
             <p:ph sz="half" idx="2"/>
           </p:nvPr>
         </p:nvSpPr>
-        <p:spPr/>
+        <p:spPr>
+          <a:xfrm>
+            <a:off x="838199" y="2445026"/>
+            <a:ext cx="5733773" cy="3741873"/>
+          </a:xfrm>
+        </p:spPr>
         <p:txBody>
           <a:bodyPr/>
           <a:lstStyle/>
           <a:p>
-            <a:endParaRPr lang="en-US"/>
+            <a:r>
+              <a:rPr lang="en-US" dirty="0"/>
+              <a:t>Via utilizing Python, we have created a two - part query processing system</a:t>
+            </a:r>
+          </a:p>
+          <a:p>
+            <a:r>
+              <a:rPr lang="en-US" dirty="0"/>
+              <a:t>First part takes user input of a given form and stores it in a normalized format after validation checks have been set</a:t>
+            </a:r>
+          </a:p>
+          <a:p>
+            <a:r>
+              <a:rPr lang="en-US" dirty="0"/>
+              <a:t>Second part processes the normalized tokens to output a table of values as specified by the input</a:t>
+            </a:r>
           </a:p>
         </p:txBody>
       </p:sp>
@@ -6925,9 +6920,16 @@
             <p:ph sz="half" idx="14"/>
           </p:nvPr>
         </p:nvSpPr>
-        <p:spPr/>
-        <p:txBody>
-          <a:bodyPr/>
+        <p:spPr>
+          <a:xfrm>
+            <a:off x="7580243" y="2981739"/>
+            <a:ext cx="4250491" cy="3374611"/>
+          </a:xfrm>
+        </p:spPr>
+        <p:txBody>
+          <a:bodyPr>
+            <a:normAutofit fontScale="77500" lnSpcReduction="20000"/>
+          </a:bodyPr>
           <a:lstStyle/>
           <a:p>
             <a:r>
@@ -6940,7 +6942,58 @@
               <a:buFont typeface="Arial" panose="020B0604020202020204" pitchFamily="34" charset="0"/>
               <a:buChar char="•"/>
             </a:pPr>
-            <a:endParaRPr lang="en-US" dirty="0"/>
+            <a:r>
+              <a:rPr lang="en-US" dirty="0"/>
+              <a:t>Support for more complex HAVING conditions with nested logic and parentheses</a:t>
+            </a:r>
+          </a:p>
+          <a:p>
+            <a:pPr marL="285750" indent="-285750">
+              <a:buFont typeface="Arial" panose="020B0604020202020204" pitchFamily="34" charset="0"/>
+              <a:buChar char="•"/>
+            </a:pPr>
+            <a:r>
+              <a:rPr lang="en-US" dirty="0"/>
+              <a:t>Ability to export query results to CSV or another structured output format</a:t>
+            </a:r>
+          </a:p>
+          <a:p>
+            <a:pPr marL="285750" indent="-285750">
+              <a:buFont typeface="Arial" panose="020B0604020202020204" pitchFamily="34" charset="0"/>
+              <a:buChar char="•"/>
+            </a:pPr>
+            <a:r>
+              <a:rPr lang="en-US" dirty="0"/>
+              <a:t>A graphical or web-based interface for entering </a:t>
+            </a:r>
+            <a:r>
+              <a:rPr lang="en-US" dirty="0" err="1"/>
+              <a:t>MFQuery</a:t>
+            </a:r>
+            <a:r>
+              <a:rPr lang="en-US" dirty="0"/>
+              <a:t> input instead of plain text</a:t>
+            </a:r>
+          </a:p>
+          <a:p>
+            <a:pPr marL="285750" indent="-285750">
+              <a:buFont typeface="Arial" panose="020B0604020202020204" pitchFamily="34" charset="0"/>
+              <a:buChar char="•"/>
+            </a:pPr>
+            <a:r>
+              <a:rPr lang="en-US" dirty="0"/>
+              <a:t>Implementation of parallel processing to evaluate multiple grouping variables and aggregate calculations simultaneously.</a:t>
+            </a:r>
+          </a:p>
+          <a:p>
+            <a:pPr marL="285750" indent="-285750">
+              <a:buFont typeface="Arial" panose="020B0604020202020204" pitchFamily="34" charset="0"/>
+              <a:buChar char="•"/>
+            </a:pPr>
+            <a:r>
+              <a:rPr lang="en-US" dirty="0"/>
+              <a:t>Serializability checks to ensure that parallel query operations produce consistent and correct results.</a:t>
+            </a:r>
           </a:p>
         </p:txBody>
       </p:sp>
@@ -11831,6 +11884,15 @@
 </file>
 
 <file path=customXml/item1.xml><?xml version="1.0" encoding="utf-8"?>
+<?mso-contentType ?>
+<FormTemplates xmlns="http://schemas.microsoft.com/sharepoint/v3/contenttype/forms">
+  <Display>DocumentLibraryForm</Display>
+  <Edit>DocumentLibraryForm</Edit>
+  <New>DocumentLibraryForm</New>
+</FormTemplates>
+</file>
+
+<file path=customXml/item2.xml><?xml version="1.0" encoding="utf-8"?>
 <ct:contentTypeSchema xmlns:ct="http://schemas.microsoft.com/office/2006/metadata/contentType" xmlns:ma="http://schemas.microsoft.com/office/2006/metadata/properties/metaAttributes" ct:_="" ma:_="" ma:contentTypeName="Document" ma:contentTypeID="0x01010079F111ED35F8CC479449609E8A0923A6" ma:contentTypeVersion="28" ma:contentTypeDescription="Create a new document." ma:contentTypeScope="" ma:versionID="60f5a4f2d2b0abadcf532d48ebf9cb71">
   <xsd:schema xmlns:xsd="http://www.w3.org/2001/XMLSchema" xmlns:xs="http://www.w3.org/2001/XMLSchema" xmlns:p="http://schemas.microsoft.com/office/2006/metadata/properties" xmlns:ns1="http://schemas.microsoft.com/sharepoint/v3" xmlns:ns2="71af3243-3dd4-4a8d-8c0d-dd76da1f02a5" xmlns:ns3="16c05727-aa75-4e4a-9b5f-8a80a1165891" xmlns:ns4="230e9df3-be65-4c73-a93b-d1236ebd677e" targetNamespace="http://schemas.microsoft.com/office/2006/metadata/properties" ma:root="true" ma:fieldsID="7dd78129e6a1811f84807ad11c651531" ns1:_="" ns2:_="" ns3:_="" ns4:_="">
     <xsd:import namespace="http://schemas.microsoft.com/sharepoint/v3"/>
@@ -12142,15 +12204,6 @@
 </ct:contentTypeSchema>
 </file>
 
-<file path=customXml/item2.xml><?xml version="1.0" encoding="utf-8"?>
-<?mso-contentType ?>
-<FormTemplates xmlns="http://schemas.microsoft.com/sharepoint/v3/contenttype/forms">
-  <Display>DocumentLibraryForm</Display>
-  <Edit>DocumentLibraryForm</Edit>
-  <New>DocumentLibraryForm</New>
-</FormTemplates>
-</file>
-
 <file path=customXml/item3.xml><?xml version="1.0" encoding="utf-8"?>
 <p:properties xmlns:p="http://schemas.microsoft.com/office/2006/metadata/properties" xmlns:xsi="http://www.w3.org/2001/XMLSchema-instance" xmlns:pc="http://schemas.microsoft.com/office/infopath/2007/PartnerControls">
   <documentManagement>
@@ -12172,6 +12225,14 @@
 </file>
 
 <file path=customXml/itemProps1.xml><?xml version="1.0" encoding="utf-8"?>
+<ds:datastoreItem xmlns:ds="http://schemas.openxmlformats.org/officeDocument/2006/customXml" ds:itemID="{CABF691C-888B-4061-8A6F-D5CE84A0254B}">
+  <ds:schemaRefs>
+    <ds:schemaRef ds:uri="http://schemas.microsoft.com/sharepoint/v3/contenttype/forms"/>
+  </ds:schemaRefs>
+</ds:datastoreItem>
+</file>
+
+<file path=customXml/itemProps2.xml><?xml version="1.0" encoding="utf-8"?>
 <ds:datastoreItem xmlns:ds="http://schemas.openxmlformats.org/officeDocument/2006/customXml" ds:itemID="{5EDE3176-A15D-46A3-BDDB-64A0D7363224}">
   <ds:schemaRefs>
     <ds:schemaRef ds:uri="http://schemas.microsoft.com/office/2006/metadata/contentType"/>
@@ -12192,14 +12253,6 @@
 </ds:datastoreItem>
 </file>
 
-<file path=customXml/itemProps2.xml><?xml version="1.0" encoding="utf-8"?>
-<ds:datastoreItem xmlns:ds="http://schemas.openxmlformats.org/officeDocument/2006/customXml" ds:itemID="{CABF691C-888B-4061-8A6F-D5CE84A0254B}">
-  <ds:schemaRefs>
-    <ds:schemaRef ds:uri="http://schemas.microsoft.com/sharepoint/v3/contenttype/forms"/>
-  </ds:schemaRefs>
-</ds:datastoreItem>
-</file>
-
 <file path=customXml/itemProps3.xml><?xml version="1.0" encoding="utf-8"?>
 <ds:datastoreItem xmlns:ds="http://schemas.openxmlformats.org/officeDocument/2006/customXml" ds:itemID="{49168DCE-134F-4610-A6AA-88CEBE8D71D2}">
   <ds:schemaRefs>

--- a/Team Amaan Presents.pptx
+++ b/Team Amaan Presents.pptx
@@ -6743,6 +6743,58 @@
           </a:p>
         </p:txBody>
       </p:sp>
+      <p:sp>
+        <p:nvSpPr>
+          <p:cNvPr id="3" name="TextBox 2">
+            <a:extLst>
+              <a:ext uri="{FF2B5EF4-FFF2-40B4-BE49-F238E27FC236}">
+                <a16:creationId xmlns:a16="http://schemas.microsoft.com/office/drawing/2014/main" id="{1B19F517-369A-466E-99BC-A299538DD87B}"/>
+              </a:ext>
+            </a:extLst>
+          </p:cNvPr>
+          <p:cNvSpPr txBox="1"/>
+          <p:nvPr/>
+        </p:nvSpPr>
+        <p:spPr>
+          <a:xfrm>
+            <a:off x="1214323" y="1887322"/>
+            <a:ext cx="10073031" cy="923330"/>
+          </a:xfrm>
+          <a:prstGeom prst="rect">
+            <a:avLst/>
+          </a:prstGeom>
+          <a:noFill/>
+        </p:spPr>
+        <p:txBody>
+          <a:bodyPr wrap="square" rtlCol="0">
+            <a:spAutoFit/>
+          </a:bodyPr>
+          <a:lstStyle/>
+          <a:p>
+            <a:pPr marL="285750" indent="-285750">
+              <a:buFont typeface="Arial" panose="020B0604020202020204" pitchFamily="34" charset="0"/>
+              <a:buChar char="•"/>
+            </a:pPr>
+            <a:r>
+              <a:rPr lang="en-US" dirty="0"/>
+              <a:t>The Aggregates can only be calculated over salves as that is hard coded in.</a:t>
+            </a:r>
+          </a:p>
+          <a:p>
+            <a:pPr marL="285750" indent="-285750">
+              <a:buFont typeface="Arial" panose="020B0604020202020204" pitchFamily="34" charset="0"/>
+              <a:buChar char="•"/>
+            </a:pPr>
+            <a:r>
+              <a:rPr lang="en-US" dirty="0"/>
+              <a:t>Parser does not convert comparison condition between aggregates in the such that clause.</a:t>
+            </a:r>
+          </a:p>
+          <a:p>
+            <a:endParaRPr lang="en-US" dirty="0"/>
+          </a:p>
+        </p:txBody>
+      </p:sp>
     </p:spTree>
     <p:extLst>
       <p:ext uri="{BB962C8B-B14F-4D97-AF65-F5344CB8AC3E}">
@@ -6944,7 +6996,7 @@
             </a:pPr>
             <a:r>
               <a:rPr lang="en-US" dirty="0"/>
-              <a:t>Support for more complex HAVING conditions with nested logic and parentheses</a:t>
+              <a:t>Support for more complex HAVING and SUCH THAT conditions with nested logic and parentheses</a:t>
             </a:r>
           </a:p>
           <a:p>
@@ -7374,7 +7426,7 @@
         </p:nvSpPr>
         <p:spPr>
           <a:xfrm>
-            <a:off x="8802612" y="2900607"/>
+            <a:off x="8802612" y="2308076"/>
             <a:ext cx="1690776" cy="1630379"/>
           </a:xfrm>
           <a:prstGeom prst="ellipse">
@@ -7491,7 +7543,7 @@
         <p:spPr>
           <a:xfrm>
             <a:off x="9648000" y="1861200"/>
-            <a:ext cx="0" cy="1039407"/>
+            <a:ext cx="0" cy="446876"/>
           </a:xfrm>
           <a:prstGeom prst="straightConnector1">
             <a:avLst/>
@@ -7530,14 +7582,14 @@
           <p:cNvCxnSpPr>
             <a:cxnSpLocks/>
             <a:stCxn id="10" idx="4"/>
-            <a:endCxn id="11" idx="3"/>
+            <a:endCxn id="8" idx="6"/>
           </p:cNvCxnSpPr>
           <p:nvPr/>
         </p:nvCxnSpPr>
         <p:spPr>
           <a:xfrm rot="5400000">
-            <a:off x="8019791" y="3694395"/>
-            <a:ext cx="791618" cy="2464800"/>
+            <a:off x="8883657" y="4564820"/>
+            <a:ext cx="1390709" cy="137978"/>
           </a:xfrm>
           <a:prstGeom prst="bentConnector2">
             <a:avLst/>
@@ -7620,6 +7672,119 @@
           </a:p>
         </p:txBody>
       </p:sp>
+      <p:sp>
+        <p:nvSpPr>
+          <p:cNvPr id="8" name="Oval 7">
+            <a:extLst>
+              <a:ext uri="{FF2B5EF4-FFF2-40B4-BE49-F238E27FC236}">
+                <a16:creationId xmlns:a16="http://schemas.microsoft.com/office/drawing/2014/main" id="{2CFB6E1F-9A34-CABA-CD2F-7B858D0FD560}"/>
+              </a:ext>
+            </a:extLst>
+          </p:cNvPr>
+          <p:cNvSpPr/>
+          <p:nvPr/>
+        </p:nvSpPr>
+        <p:spPr>
+          <a:xfrm>
+            <a:off x="7666823" y="4506253"/>
+            <a:ext cx="1843199" cy="1645821"/>
+          </a:xfrm>
+          <a:prstGeom prst="ellipse">
+            <a:avLst/>
+          </a:prstGeom>
+          <a:solidFill>
+            <a:schemeClr val="bg1"/>
+          </a:solidFill>
+        </p:spPr>
+        <p:style>
+          <a:lnRef idx="2">
+            <a:schemeClr val="accent1">
+              <a:shade val="15000"/>
+            </a:schemeClr>
+          </a:lnRef>
+          <a:fillRef idx="1">
+            <a:schemeClr val="accent1"/>
+          </a:fillRef>
+          <a:effectRef idx="0">
+            <a:schemeClr val="accent1"/>
+          </a:effectRef>
+          <a:fontRef idx="minor">
+            <a:schemeClr val="lt1"/>
+          </a:fontRef>
+        </p:style>
+        <p:txBody>
+          <a:bodyPr rtlCol="0" anchor="ctr"/>
+          <a:lstStyle/>
+          <a:p>
+            <a:pPr algn="ctr"/>
+            <a:r>
+              <a:rPr lang="en-US" dirty="0">
+                <a:solidFill>
+                  <a:schemeClr val="tx1"/>
+                </a:solidFill>
+              </a:rPr>
+              <a:t>Generated</a:t>
+            </a:r>
+            <a:br>
+              <a:rPr lang="en-US" dirty="0">
+                <a:solidFill>
+                  <a:schemeClr val="tx1"/>
+                </a:solidFill>
+              </a:rPr>
+            </a:br>
+            <a:r>
+              <a:rPr lang="en-US" dirty="0">
+                <a:solidFill>
+                  <a:schemeClr val="tx1"/>
+                </a:solidFill>
+              </a:rPr>
+              <a:t>Query </a:t>
+            </a:r>
+          </a:p>
+        </p:txBody>
+      </p:sp>
+      <p:cxnSp>
+        <p:nvCxnSpPr>
+          <p:cNvPr id="17" name="Straight Arrow Connector 16">
+            <a:extLst>
+              <a:ext uri="{FF2B5EF4-FFF2-40B4-BE49-F238E27FC236}">
+                <a16:creationId xmlns:a16="http://schemas.microsoft.com/office/drawing/2014/main" id="{2117B789-602A-28C1-C1BF-25C7F26DCB70}"/>
+              </a:ext>
+            </a:extLst>
+          </p:cNvPr>
+          <p:cNvCxnSpPr>
+            <a:stCxn id="8" idx="2"/>
+            <a:endCxn id="11" idx="3"/>
+          </p:cNvCxnSpPr>
+          <p:nvPr/>
+        </p:nvCxnSpPr>
+        <p:spPr>
+          <a:xfrm flipH="1" flipV="1">
+            <a:off x="7183200" y="5322604"/>
+            <a:ext cx="483623" cy="6560"/>
+          </a:xfrm>
+          <a:prstGeom prst="straightConnector1">
+            <a:avLst/>
+          </a:prstGeom>
+          <a:ln>
+            <a:tailEnd type="triangle"/>
+          </a:ln>
+        </p:spPr>
+        <p:style>
+          <a:lnRef idx="1">
+            <a:schemeClr val="dk1"/>
+          </a:lnRef>
+          <a:fillRef idx="0">
+            <a:schemeClr val="dk1"/>
+          </a:fillRef>
+          <a:effectRef idx="0">
+            <a:schemeClr val="dk1"/>
+          </a:effectRef>
+          <a:fontRef idx="minor">
+            <a:schemeClr val="tx1"/>
+          </a:fontRef>
+        </p:style>
+      </p:cxnSp>
     </p:spTree>
     <p:extLst>
       <p:ext uri="{BB962C8B-B14F-4D97-AF65-F5344CB8AC3E}">
@@ -11884,12 +12049,23 @@
 </file>
 
 <file path=customXml/item1.xml><?xml version="1.0" encoding="utf-8"?>
-<?mso-contentType ?>
-<FormTemplates xmlns="http://schemas.microsoft.com/sharepoint/v3/contenttype/forms">
-  <Display>DocumentLibraryForm</Display>
-  <Edit>DocumentLibraryForm</Edit>
-  <New>DocumentLibraryForm</New>
-</FormTemplates>
+<p:properties xmlns:p="http://schemas.microsoft.com/office/2006/metadata/properties" xmlns:xsi="http://www.w3.org/2001/XMLSchema-instance" xmlns:pc="http://schemas.microsoft.com/office/infopath/2007/PartnerControls">
+  <documentManagement>
+    <_ip_UnifiedCompliancePolicyUIAction xmlns="http://schemas.microsoft.com/sharepoint/v3" xsi:nil="true"/>
+    <Image xmlns="71af3243-3dd4-4a8d-8c0d-dd76da1f02a5">
+      <Url xsi:nil="true"/>
+      <Description xsi:nil="true"/>
+    </Image>
+    <Status xmlns="71af3243-3dd4-4a8d-8c0d-dd76da1f02a5">Not started</Status>
+    <Background xmlns="71af3243-3dd4-4a8d-8c0d-dd76da1f02a5">false</Background>
+    <_ip_UnifiedCompliancePolicyProperties xmlns="http://schemas.microsoft.com/sharepoint/v3" xsi:nil="true"/>
+    <ImageTagsTaxHTField xmlns="71af3243-3dd4-4a8d-8c0d-dd76da1f02a5">
+      <Terms xmlns="http://schemas.microsoft.com/office/infopath/2007/PartnerControls"/>
+    </ImageTagsTaxHTField>
+    <TaxCatchAll xmlns="230e9df3-be65-4c73-a93b-d1236ebd677e" xsi:nil="true"/>
+    <MediaServiceKeyPoints xmlns="71af3243-3dd4-4a8d-8c0d-dd76da1f02a5" xsi:nil="true"/>
+  </documentManagement>
+</p:properties>
 </file>
 
 <file path=customXml/item2.xml><?xml version="1.0" encoding="utf-8"?>
@@ -12205,29 +12381,22 @@
 </file>
 
 <file path=customXml/item3.xml><?xml version="1.0" encoding="utf-8"?>
-<p:properties xmlns:p="http://schemas.microsoft.com/office/2006/metadata/properties" xmlns:xsi="http://www.w3.org/2001/XMLSchema-instance" xmlns:pc="http://schemas.microsoft.com/office/infopath/2007/PartnerControls">
-  <documentManagement>
-    <_ip_UnifiedCompliancePolicyUIAction xmlns="http://schemas.microsoft.com/sharepoint/v3" xsi:nil="true"/>
-    <Image xmlns="71af3243-3dd4-4a8d-8c0d-dd76da1f02a5">
-      <Url xsi:nil="true"/>
-      <Description xsi:nil="true"/>
-    </Image>
-    <Status xmlns="71af3243-3dd4-4a8d-8c0d-dd76da1f02a5">Not started</Status>
-    <Background xmlns="71af3243-3dd4-4a8d-8c0d-dd76da1f02a5">false</Background>
-    <_ip_UnifiedCompliancePolicyProperties xmlns="http://schemas.microsoft.com/sharepoint/v3" xsi:nil="true"/>
-    <ImageTagsTaxHTField xmlns="71af3243-3dd4-4a8d-8c0d-dd76da1f02a5">
-      <Terms xmlns="http://schemas.microsoft.com/office/infopath/2007/PartnerControls"/>
-    </ImageTagsTaxHTField>
-    <TaxCatchAll xmlns="230e9df3-be65-4c73-a93b-d1236ebd677e" xsi:nil="true"/>
-    <MediaServiceKeyPoints xmlns="71af3243-3dd4-4a8d-8c0d-dd76da1f02a5" xsi:nil="true"/>
-  </documentManagement>
-</p:properties>
+<?mso-contentType ?>
+<FormTemplates xmlns="http://schemas.microsoft.com/sharepoint/v3/contenttype/forms">
+  <Display>DocumentLibraryForm</Display>
+  <Edit>DocumentLibraryForm</Edit>
+  <New>DocumentLibraryForm</New>
+</FormTemplates>
 </file>
 
 <file path=customXml/itemProps1.xml><?xml version="1.0" encoding="utf-8"?>
-<ds:datastoreItem xmlns:ds="http://schemas.openxmlformats.org/officeDocument/2006/customXml" ds:itemID="{CABF691C-888B-4061-8A6F-D5CE84A0254B}">
+<ds:datastoreItem xmlns:ds="http://schemas.openxmlformats.org/officeDocument/2006/customXml" ds:itemID="{49168DCE-134F-4610-A6AA-88CEBE8D71D2}">
   <ds:schemaRefs>
-    <ds:schemaRef ds:uri="http://schemas.microsoft.com/sharepoint/v3/contenttype/forms"/>
+    <ds:schemaRef ds:uri="http://schemas.microsoft.com/office/2006/metadata/properties"/>
+    <ds:schemaRef ds:uri="http://schemas.microsoft.com/office/infopath/2007/PartnerControls"/>
+    <ds:schemaRef ds:uri="http://schemas.microsoft.com/sharepoint/v3"/>
+    <ds:schemaRef ds:uri="71af3243-3dd4-4a8d-8c0d-dd76da1f02a5"/>
+    <ds:schemaRef ds:uri="230e9df3-be65-4c73-a93b-d1236ebd677e"/>
   </ds:schemaRefs>
 </ds:datastoreItem>
 </file>
@@ -12254,13 +12423,9 @@
 </file>
 
 <file path=customXml/itemProps3.xml><?xml version="1.0" encoding="utf-8"?>
-<ds:datastoreItem xmlns:ds="http://schemas.openxmlformats.org/officeDocument/2006/customXml" ds:itemID="{49168DCE-134F-4610-A6AA-88CEBE8D71D2}">
+<ds:datastoreItem xmlns:ds="http://schemas.openxmlformats.org/officeDocument/2006/customXml" ds:itemID="{CABF691C-888B-4061-8A6F-D5CE84A0254B}">
   <ds:schemaRefs>
-    <ds:schemaRef ds:uri="http://schemas.microsoft.com/office/2006/metadata/properties"/>
-    <ds:schemaRef ds:uri="http://schemas.microsoft.com/office/infopath/2007/PartnerControls"/>
-    <ds:schemaRef ds:uri="http://schemas.microsoft.com/sharepoint/v3"/>
-    <ds:schemaRef ds:uri="71af3243-3dd4-4a8d-8c0d-dd76da1f02a5"/>
-    <ds:schemaRef ds:uri="230e9df3-be65-4c73-a93b-d1236ebd677e"/>
+    <ds:schemaRef ds:uri="http://schemas.microsoft.com/sharepoint/v3/contenttype/forms"/>
   </ds:schemaRefs>
 </ds:datastoreItem>
 </file>
